--- a/output_pptx/Man_Of_Sorrows.pptx
+++ b/output_pptx/Man_Of_Sorrows.pptx
@@ -20,6 +20,10 @@
     <p:sldId id="268" r:id="rId19"/>
     <p:sldId id="269" r:id="rId20"/>
     <p:sldId id="270" r:id="rId21"/>
+    <p:sldId id="271" r:id="rId22"/>
+    <p:sldId id="272" r:id="rId23"/>
+    <p:sldId id="273" r:id="rId24"/>
+    <p:sldId id="274" r:id="rId25"/>
   </p:sldIdLst>
   <p:sldSz cx="12191695" cy="6858000" type="screen4x3"/>
   <p:notesSz cx="6858000" cy="9144000"/>
@@ -3118,8 +3122,8 @@
         </p:nvSpPr>
         <p:spPr>
           <a:xfrm>
-            <a:off x="594360" y="1837944"/>
-            <a:ext cx="11002975" cy="685800"/>
+            <a:off x="640080" y="1650492"/>
+            <a:ext cx="10911535" cy="731520"/>
           </a:xfrm>
           <a:prstGeom prst="rect">
             <a:avLst/>
@@ -3134,7 +3138,7 @@
           <a:p>
             <a:pPr algn="ctr"/>
             <a:r>
-              <a:rPr sz="4400" b="1" i="0">
+              <a:rPr sz="4800" b="1" i="0">
                 <a:solidFill>
                   <a:srgbClr val="FFFFFF"/>
                 </a:solidFill>
@@ -3153,8 +3157,8 @@
         </p:nvSpPr>
         <p:spPr>
           <a:xfrm>
-            <a:off x="594360" y="2560320"/>
-            <a:ext cx="11002975" cy="384048"/>
+            <a:off x="640080" y="2418588"/>
+            <a:ext cx="10911535" cy="365760"/>
           </a:xfrm>
           <a:prstGeom prst="rect">
             <a:avLst/>
@@ -3171,7 +3175,7 @@
             <a:r>
               <a:rPr sz="2400" b="0" i="1">
                 <a:solidFill>
-                  <a:srgbClr val="B4B4B4"/>
+                  <a:srgbClr val="AAAAAA"/>
                 </a:solidFill>
                 <a:latin typeface="Arial"/>
               </a:rPr>
@@ -3188,8 +3192,8 @@
         </p:nvSpPr>
         <p:spPr>
           <a:xfrm>
-            <a:off x="594360" y="2980944"/>
-            <a:ext cx="11002975" cy="347472"/>
+            <a:off x="640080" y="2985516"/>
+            <a:ext cx="10911535" cy="731520"/>
           </a:xfrm>
           <a:prstGeom prst="rect">
             <a:avLst/>
@@ -3204,13 +3208,13 @@
           <a:p>
             <a:pPr algn="ctr"/>
             <a:r>
-              <a:rPr sz="2000" b="0" i="1">
-                <a:solidFill>
-                  <a:srgbClr val="8C8C8C"/>
+              <a:rPr sz="4800" b="1" i="0">
+                <a:solidFill>
+                  <a:srgbClr val="FFFFFF"/>
                 </a:solidFill>
                 <a:latin typeface="Arial"/>
               </a:rPr>
-              <a:t/>
+              <a:t>神の怒り  を	 背負ったイエス</a:t>
             </a:r>
           </a:p>
         </p:txBody>
@@ -3223,8 +3227,8 @@
         </p:nvSpPr>
         <p:spPr>
           <a:xfrm>
-            <a:off x="594360" y="3529584"/>
-            <a:ext cx="11002975" cy="685800"/>
+            <a:off x="640080" y="3753612"/>
+            <a:ext cx="10911535" cy="365760"/>
           </a:xfrm>
           <a:prstGeom prst="rect">
             <a:avLst/>
@@ -3239,13 +3243,13 @@
           <a:p>
             <a:pPr algn="ctr"/>
             <a:r>
-              <a:rPr sz="4400" b="1" i="0">
-                <a:solidFill>
-                  <a:srgbClr val="FFFFFF"/>
+              <a:rPr sz="2400" b="0" i="1">
+                <a:solidFill>
+                  <a:srgbClr val="AAAAAA"/>
                 </a:solidFill>
                 <a:latin typeface="Arial"/>
               </a:rPr>
-              <a:t>神の怒り  を	 背負ったイエス</a:t>
+              <a:t>kami no ikari wo  seoutta iesu</a:t>
             </a:r>
           </a:p>
         </p:txBody>
@@ -3258,8 +3262,8 @@
         </p:nvSpPr>
         <p:spPr>
           <a:xfrm>
-            <a:off x="594360" y="4251960"/>
-            <a:ext cx="11002975" cy="384048"/>
+            <a:off x="640080" y="4530852"/>
+            <a:ext cx="10911535" cy="310896"/>
           </a:xfrm>
           <a:prstGeom prst="rect">
             <a:avLst/>
@@ -3274,13 +3278,13 @@
           <a:p>
             <a:pPr algn="ctr"/>
             <a:r>
-              <a:rPr sz="2400" b="0" i="1">
-                <a:solidFill>
-                  <a:srgbClr val="B4B4B4"/>
+              <a:rPr sz="2000" b="0" i="1">
+                <a:solidFill>
+                  <a:srgbClr val="828282"/>
                 </a:solidFill>
                 <a:latin typeface="Arial"/>
               </a:rPr>
-              <a:t>kami no ikari wo  seoutta iesu</a:t>
+              <a:t>O Cordeiro que sofreu</a:t>
             </a:r>
           </a:p>
         </p:txBody>
@@ -3293,8 +3297,8 @@
         </p:nvSpPr>
         <p:spPr>
           <a:xfrm>
-            <a:off x="594360" y="4672584"/>
-            <a:ext cx="11002975" cy="347472"/>
+            <a:off x="640080" y="4896612"/>
+            <a:ext cx="10911535" cy="310896"/>
           </a:xfrm>
           <a:prstGeom prst="rect">
             <a:avLst/>
@@ -3311,11 +3315,11 @@
             <a:r>
               <a:rPr sz="2000" b="0" i="1">
                 <a:solidFill>
-                  <a:srgbClr val="8C8C8C"/>
+                  <a:srgbClr val="828282"/>
                 </a:solidFill>
                 <a:latin typeface="Arial"/>
               </a:rPr>
-              <a:t/>
+              <a:t>Traído pelos seus</a:t>
             </a:r>
           </a:p>
         </p:txBody>
@@ -3354,8 +3358,8 @@
         </p:nvSpPr>
         <p:spPr>
           <a:xfrm>
-            <a:off x="594360" y="1837944"/>
-            <a:ext cx="11002975" cy="685800"/>
+            <a:off x="640080" y="2052828"/>
+            <a:ext cx="10911535" cy="731520"/>
           </a:xfrm>
           <a:prstGeom prst="rect">
             <a:avLst/>
@@ -3370,13 +3374,13 @@
           <a:p>
             <a:pPr algn="ctr"/>
             <a:r>
-              <a:rPr sz="4400" b="1" i="0">
+              <a:rPr sz="4800" b="1" i="0">
                 <a:solidFill>
                   <a:srgbClr val="FFFFFF"/>
                 </a:solidFill>
                 <a:latin typeface="Arial"/>
               </a:rPr>
-              <a:t>この十字架こ - そ救 - い 注がれた主の愛</a:t>
+              <a:t>Numa rude cruz me salvaste</a:t>
             </a:r>
           </a:p>
         </p:txBody>
@@ -3389,8 +3393,8 @@
         </p:nvSpPr>
         <p:spPr>
           <a:xfrm>
-            <a:off x="594360" y="2560320"/>
-            <a:ext cx="11002975" cy="384048"/>
+            <a:off x="640080" y="2985516"/>
+            <a:ext cx="10911535" cy="731520"/>
           </a:xfrm>
           <a:prstGeom prst="rect">
             <a:avLst/>
@@ -3405,153 +3409,13 @@
           <a:p>
             <a:pPr algn="ctr"/>
             <a:r>
-              <a:rPr sz="2144" b="0" i="1">
-                <a:solidFill>
-                  <a:srgbClr val="B4B4B4"/>
+              <a:rPr sz="4800" b="1" i="0">
+                <a:solidFill>
+                  <a:srgbClr val="FFFFFF"/>
                 </a:solidFill>
                 <a:latin typeface="Arial"/>
               </a:rPr>
-              <a:t>kono jyuujika koso sukui   sosogareta shu no ai</a:t>
-            </a:r>
-          </a:p>
-        </p:txBody>
-      </p:sp>
-      <p:sp>
-        <p:nvSpPr>
-          <p:cNvPr id="4" name="TextBox 3"/>
-          <p:cNvSpPr txBox="1"/>
-          <p:nvPr/>
-        </p:nvSpPr>
-        <p:spPr>
-          <a:xfrm>
-            <a:off x="594360" y="2980944"/>
-            <a:ext cx="11002975" cy="347472"/>
-          </a:xfrm>
-          <a:prstGeom prst="rect">
-            <a:avLst/>
-          </a:prstGeom>
-          <a:noFill/>
-        </p:spPr>
-        <p:txBody>
-          <a:bodyPr wrap="square">
-            <a:spAutoFit/>
-          </a:bodyPr>
-          <a:lstStyle/>
-          <a:p>
-            <a:pPr algn="ctr"/>
-            <a:r>
-              <a:rPr sz="2000" b="0" i="1">
-                <a:solidFill>
-                  <a:srgbClr val="8C8C8C"/>
-                </a:solidFill>
-                <a:latin typeface="Arial"/>
-              </a:rPr>
-              <a:t/>
-            </a:r>
-          </a:p>
-        </p:txBody>
-      </p:sp>
-      <p:sp>
-        <p:nvSpPr>
-          <p:cNvPr id="5" name="TextBox 4"/>
-          <p:cNvSpPr txBox="1"/>
-          <p:nvPr/>
-        </p:nvSpPr>
-        <p:spPr>
-          <a:xfrm>
-            <a:off x="594360" y="3529584"/>
-            <a:ext cx="11002975" cy="685800"/>
-          </a:xfrm>
-          <a:prstGeom prst="rect">
-            <a:avLst/>
-          </a:prstGeom>
-          <a:noFill/>
-        </p:spPr>
-        <p:txBody>
-          <a:bodyPr wrap="square">
-            <a:spAutoFit/>
-          </a:bodyPr>
-          <a:lstStyle/>
-          <a:p>
-            <a:pPr algn="ctr"/>
-            <a:r>
-              <a:rPr sz="4223" b="1" i="0">
-                <a:solidFill>
-                  <a:srgbClr val="FFFFFF"/>
-                </a:solidFill>
-                <a:latin typeface="Arial"/>
-              </a:rPr>
-              <a:t>心  -  から　ハレル  -  ヤ 神をたたえる</a:t>
-            </a:r>
-          </a:p>
-        </p:txBody>
-      </p:sp>
-      <p:sp>
-        <p:nvSpPr>
-          <p:cNvPr id="6" name="TextBox 5"/>
-          <p:cNvSpPr txBox="1"/>
-          <p:nvPr/>
-        </p:nvSpPr>
-        <p:spPr>
-          <a:xfrm>
-            <a:off x="594360" y="4251960"/>
-            <a:ext cx="11002975" cy="384048"/>
-          </a:xfrm>
-          <a:prstGeom prst="rect">
-            <a:avLst/>
-          </a:prstGeom>
-          <a:noFill/>
-        </p:spPr>
-        <p:txBody>
-          <a:bodyPr wrap="square">
-            <a:spAutoFit/>
-          </a:bodyPr>
-          <a:lstStyle/>
-          <a:p>
-            <a:pPr algn="ctr"/>
-            <a:r>
-              <a:rPr sz="2400" b="0" i="1">
-                <a:solidFill>
-                  <a:srgbClr val="B4B4B4"/>
-                </a:solidFill>
-                <a:latin typeface="Arial"/>
-              </a:rPr>
-              <a:t>kokoro kara halelujah  kami wo tataeru</a:t>
-            </a:r>
-          </a:p>
-        </p:txBody>
-      </p:sp>
-      <p:sp>
-        <p:nvSpPr>
-          <p:cNvPr id="7" name="TextBox 6"/>
-          <p:cNvSpPr txBox="1"/>
-          <p:nvPr/>
-        </p:nvSpPr>
-        <p:spPr>
-          <a:xfrm>
-            <a:off x="594360" y="4672584"/>
-            <a:ext cx="11002975" cy="347472"/>
-          </a:xfrm>
-          <a:prstGeom prst="rect">
-            <a:avLst/>
-          </a:prstGeom>
-          <a:noFill/>
-        </p:spPr>
-        <p:txBody>
-          <a:bodyPr wrap="square">
-            <a:spAutoFit/>
-          </a:bodyPr>
-          <a:lstStyle/>
-          <a:p>
-            <a:pPr algn="ctr"/>
-            <a:r>
-              <a:rPr sz="2000" b="0" i="1">
-                <a:solidFill>
-                  <a:srgbClr val="8C8C8C"/>
-                </a:solidFill>
-                <a:latin typeface="Arial"/>
-              </a:rPr>
-              <a:t/>
+              <a:t>Derramaste ali teu amor</a:t>
             </a:r>
           </a:p>
         </p:txBody>
@@ -3590,8 +3454,8 @@
         </p:nvSpPr>
         <p:spPr>
           <a:xfrm>
-            <a:off x="594360" y="1837944"/>
-            <a:ext cx="11002975" cy="685800"/>
+            <a:off x="640080" y="2052828"/>
+            <a:ext cx="10911535" cy="731520"/>
           </a:xfrm>
           <a:prstGeom prst="rect">
             <a:avLst/>
@@ -3606,13 +3470,13 @@
           <a:p>
             <a:pPr algn="ctr"/>
             <a:r>
-              <a:rPr sz="3911" b="1" i="0">
+              <a:rPr sz="4800" b="1" i="0">
                 <a:solidFill>
                   <a:srgbClr val="FFFFFF"/>
                 </a:solidFill>
                 <a:latin typeface="Arial"/>
               </a:rPr>
-              <a:t>この十字架こ - そ救 - い     注がれた主の愛</a:t>
+              <a:t>Minh'alma cantará aleluia</a:t>
             </a:r>
           </a:p>
         </p:txBody>
@@ -3625,8 +3489,8 @@
         </p:nvSpPr>
         <p:spPr>
           <a:xfrm>
-            <a:off x="594360" y="2560320"/>
-            <a:ext cx="11002975" cy="384048"/>
+            <a:off x="640080" y="2985516"/>
+            <a:ext cx="10911535" cy="731520"/>
           </a:xfrm>
           <a:prstGeom prst="rect">
             <a:avLst/>
@@ -3641,153 +3505,13 @@
           <a:p>
             <a:pPr algn="ctr"/>
             <a:r>
-              <a:rPr sz="2191" b="0" i="1">
-                <a:solidFill>
-                  <a:srgbClr val="B4B4B4"/>
+              <a:rPr sz="4800" b="1" i="0">
+                <a:solidFill>
+                  <a:srgbClr val="FFFFFF"/>
                 </a:solidFill>
                 <a:latin typeface="Arial"/>
               </a:rPr>
-              <a:t>kono jyuujika koso sukui  sosogareta shu no ai</a:t>
-            </a:r>
-          </a:p>
-        </p:txBody>
-      </p:sp>
-      <p:sp>
-        <p:nvSpPr>
-          <p:cNvPr id="4" name="TextBox 3"/>
-          <p:cNvSpPr txBox="1"/>
-          <p:nvPr/>
-        </p:nvSpPr>
-        <p:spPr>
-          <a:xfrm>
-            <a:off x="594360" y="2980944"/>
-            <a:ext cx="11002975" cy="347472"/>
-          </a:xfrm>
-          <a:prstGeom prst="rect">
-            <a:avLst/>
-          </a:prstGeom>
-          <a:noFill/>
-        </p:spPr>
-        <p:txBody>
-          <a:bodyPr wrap="square">
-            <a:spAutoFit/>
-          </a:bodyPr>
-          <a:lstStyle/>
-          <a:p>
-            <a:pPr algn="ctr"/>
-            <a:r>
-              <a:rPr sz="2000" b="0" i="1">
-                <a:solidFill>
-                  <a:srgbClr val="8C8C8C"/>
-                </a:solidFill>
-                <a:latin typeface="Arial"/>
-              </a:rPr>
-              <a:t/>
-            </a:r>
-          </a:p>
-        </p:txBody>
-      </p:sp>
-      <p:sp>
-        <p:nvSpPr>
-          <p:cNvPr id="5" name="TextBox 4"/>
-          <p:cNvSpPr txBox="1"/>
-          <p:nvPr/>
-        </p:nvSpPr>
-        <p:spPr>
-          <a:xfrm>
-            <a:off x="594360" y="3529584"/>
-            <a:ext cx="11002975" cy="685800"/>
-          </a:xfrm>
-          <a:prstGeom prst="rect">
-            <a:avLst/>
-          </a:prstGeom>
-          <a:noFill/>
-        </p:spPr>
-        <p:txBody>
-          <a:bodyPr wrap="square">
-            <a:spAutoFit/>
-          </a:bodyPr>
-          <a:lstStyle/>
-          <a:p>
-            <a:pPr algn="ctr"/>
-            <a:r>
-              <a:rPr sz="4223" b="1" i="0">
-                <a:solidFill>
-                  <a:srgbClr val="FFFFFF"/>
-                </a:solidFill>
-                <a:latin typeface="Arial"/>
-              </a:rPr>
-              <a:t>心  -  から　ハレル-ヤ     神をたたえる</a:t>
-            </a:r>
-          </a:p>
-        </p:txBody>
-      </p:sp>
-      <p:sp>
-        <p:nvSpPr>
-          <p:cNvPr id="6" name="TextBox 5"/>
-          <p:cNvSpPr txBox="1"/>
-          <p:nvPr/>
-        </p:nvSpPr>
-        <p:spPr>
-          <a:xfrm>
-            <a:off x="594360" y="4251960"/>
-            <a:ext cx="11002975" cy="384048"/>
-          </a:xfrm>
-          <a:prstGeom prst="rect">
-            <a:avLst/>
-          </a:prstGeom>
-          <a:noFill/>
-        </p:spPr>
-        <p:txBody>
-          <a:bodyPr wrap="square">
-            <a:spAutoFit/>
-          </a:bodyPr>
-          <a:lstStyle/>
-          <a:p>
-            <a:pPr algn="ctr"/>
-            <a:r>
-              <a:rPr sz="2400" b="0" i="1">
-                <a:solidFill>
-                  <a:srgbClr val="B4B4B4"/>
-                </a:solidFill>
-                <a:latin typeface="Arial"/>
-              </a:rPr>
-              <a:t>kokoro kara halelujah  kami wo tataeru</a:t>
-            </a:r>
-          </a:p>
-        </p:txBody>
-      </p:sp>
-      <p:sp>
-        <p:nvSpPr>
-          <p:cNvPr id="7" name="TextBox 6"/>
-          <p:cNvSpPr txBox="1"/>
-          <p:nvPr/>
-        </p:nvSpPr>
-        <p:spPr>
-          <a:xfrm>
-            <a:off x="594360" y="4672584"/>
-            <a:ext cx="11002975" cy="347472"/>
-          </a:xfrm>
-          <a:prstGeom prst="rect">
-            <a:avLst/>
-          </a:prstGeom>
-          <a:noFill/>
-        </p:spPr>
-        <p:txBody>
-          <a:bodyPr wrap="square">
-            <a:spAutoFit/>
-          </a:bodyPr>
-          <a:lstStyle/>
-          <a:p>
-            <a:pPr algn="ctr"/>
-            <a:r>
-              <a:rPr sz="2000" b="0" i="1">
-                <a:solidFill>
-                  <a:srgbClr val="8C8C8C"/>
-                </a:solidFill>
-                <a:latin typeface="Arial"/>
-              </a:rPr>
-              <a:t/>
+              <a:t>Glória e honra a ti, Senhor</a:t>
             </a:r>
           </a:p>
         </p:txBody>
@@ -3826,8 +3550,8 @@
         </p:nvSpPr>
         <p:spPr>
           <a:xfrm>
-            <a:off x="594360" y="2258568"/>
-            <a:ext cx="11002975" cy="685800"/>
+            <a:off x="640080" y="1650492"/>
+            <a:ext cx="10911535" cy="731520"/>
           </a:xfrm>
           <a:prstGeom prst="rect">
             <a:avLst/>
@@ -3842,13 +3566,13 @@
           <a:p>
             <a:pPr algn="ctr"/>
             <a:r>
-              <a:rPr sz="4400" b="1" i="0">
+              <a:rPr sz="4800" b="1" i="0">
                 <a:solidFill>
                   <a:srgbClr val="FFFFFF"/>
                 </a:solidFill>
                 <a:latin typeface="Arial"/>
               </a:rPr>
-              <a:t>Unigênito de Deus</a:t>
+              <a:t>この十字架こ - そ救 - い 注がれた主の愛</a:t>
             </a:r>
           </a:p>
         </p:txBody>
@@ -3861,8 +3585,8 @@
         </p:nvSpPr>
         <p:spPr>
           <a:xfrm>
-            <a:off x="594360" y="2980944"/>
-            <a:ext cx="11002975" cy="347472"/>
+            <a:off x="640080" y="2418588"/>
+            <a:ext cx="10911535" cy="365760"/>
           </a:xfrm>
           <a:prstGeom prst="rect">
             <a:avLst/>
@@ -3877,13 +3601,13 @@
           <a:p>
             <a:pPr algn="ctr"/>
             <a:r>
-              <a:rPr sz="2200" b="0" i="1">
-                <a:solidFill>
-                  <a:srgbClr val="8C8C8C"/>
+              <a:rPr sz="2400" b="0" i="1">
+                <a:solidFill>
+                  <a:srgbClr val="AAAAAA"/>
                 </a:solidFill>
                 <a:latin typeface="Arial"/>
               </a:rPr>
-              <a:t/>
+              <a:t>kono jyuujika koso sukui   sosogareta shu no ai</a:t>
             </a:r>
           </a:p>
         </p:txBody>
@@ -3896,8 +3620,8 @@
         </p:nvSpPr>
         <p:spPr>
           <a:xfrm>
-            <a:off x="594360" y="3529584"/>
-            <a:ext cx="11002975" cy="685800"/>
+            <a:off x="640080" y="2985516"/>
+            <a:ext cx="10911535" cy="731520"/>
           </a:xfrm>
           <a:prstGeom prst="rect">
             <a:avLst/>
@@ -3912,13 +3636,13 @@
           <a:p>
             <a:pPr algn="ctr"/>
             <a:r>
-              <a:rPr sz="4400" b="1" i="0">
+              <a:rPr sz="4600" b="1" i="0">
                 <a:solidFill>
                   <a:srgbClr val="FFFFFF"/>
                 </a:solidFill>
                 <a:latin typeface="Arial"/>
               </a:rPr>
-              <a:t>Vieste redimir</a:t>
+              <a:t>心  -  から　ハレル  -  ヤ 神をたたえる</a:t>
             </a:r>
           </a:p>
         </p:txBody>
@@ -3931,8 +3655,8 @@
         </p:nvSpPr>
         <p:spPr>
           <a:xfrm>
-            <a:off x="594360" y="4251960"/>
-            <a:ext cx="11002975" cy="347472"/>
+            <a:off x="640080" y="3753612"/>
+            <a:ext cx="10911535" cy="365760"/>
           </a:xfrm>
           <a:prstGeom prst="rect">
             <a:avLst/>
@@ -3947,13 +3671,83 @@
           <a:p>
             <a:pPr algn="ctr"/>
             <a:r>
-              <a:rPr sz="2200" b="0" i="1">
-                <a:solidFill>
-                  <a:srgbClr val="8C8C8C"/>
+              <a:rPr sz="2400" b="0" i="1">
+                <a:solidFill>
+                  <a:srgbClr val="AAAAAA"/>
                 </a:solidFill>
                 <a:latin typeface="Arial"/>
               </a:rPr>
-              <a:t/>
+              <a:t>kokoro kara halelujah  kami wo tataeru</a:t>
+            </a:r>
+          </a:p>
+        </p:txBody>
+      </p:sp>
+      <p:sp>
+        <p:nvSpPr>
+          <p:cNvPr id="6" name="TextBox 5"/>
+          <p:cNvSpPr txBox="1"/>
+          <p:nvPr/>
+        </p:nvSpPr>
+        <p:spPr>
+          <a:xfrm>
+            <a:off x="640080" y="4530852"/>
+            <a:ext cx="10911535" cy="310896"/>
+          </a:xfrm>
+          <a:prstGeom prst="rect">
+            <a:avLst/>
+          </a:prstGeom>
+          <a:noFill/>
+        </p:spPr>
+        <p:txBody>
+          <a:bodyPr wrap="square">
+            <a:spAutoFit/>
+          </a:bodyPr>
+          <a:lstStyle/>
+          <a:p>
+            <a:pPr algn="ctr"/>
+            <a:r>
+              <a:rPr sz="2000" b="0" i="1">
+                <a:solidFill>
+                  <a:srgbClr val="828282"/>
+                </a:solidFill>
+                <a:latin typeface="Arial"/>
+              </a:rPr>
+              <a:t>Em silêncio suportou</a:t>
+            </a:r>
+          </a:p>
+        </p:txBody>
+      </p:sp>
+      <p:sp>
+        <p:nvSpPr>
+          <p:cNvPr id="7" name="TextBox 6"/>
+          <p:cNvSpPr txBox="1"/>
+          <p:nvPr/>
+        </p:nvSpPr>
+        <p:spPr>
+          <a:xfrm>
+            <a:off x="640080" y="4896612"/>
+            <a:ext cx="10911535" cy="310896"/>
+          </a:xfrm>
+          <a:prstGeom prst="rect">
+            <a:avLst/>
+          </a:prstGeom>
+          <a:noFill/>
+        </p:spPr>
+        <p:txBody>
+          <a:bodyPr wrap="square">
+            <a:spAutoFit/>
+          </a:bodyPr>
+          <a:lstStyle/>
+          <a:p>
+            <a:pPr algn="ctr"/>
+            <a:r>
+              <a:rPr sz="2000" b="0" i="1">
+                <a:solidFill>
+                  <a:srgbClr val="828282"/>
+                </a:solidFill>
+                <a:latin typeface="Arial"/>
+              </a:rPr>
+              <a:t>Açoite, escárnio e dor</a:t>
             </a:r>
           </a:p>
         </p:txBody>
@@ -3992,8 +3786,8 @@
         </p:nvSpPr>
         <p:spPr>
           <a:xfrm>
-            <a:off x="594360" y="2258568"/>
-            <a:ext cx="11002975" cy="685800"/>
+            <a:off x="640080" y="1650492"/>
+            <a:ext cx="10911535" cy="731520"/>
           </a:xfrm>
           <a:prstGeom prst="rect">
             <a:avLst/>
@@ -4008,13 +3802,13 @@
           <a:p>
             <a:pPr algn="ctr"/>
             <a:r>
-              <a:rPr sz="4400" b="1" i="0">
+              <a:rPr sz="4200" b="1" i="0">
                 <a:solidFill>
                   <a:srgbClr val="FFFFFF"/>
                 </a:solidFill>
                 <a:latin typeface="Arial"/>
               </a:rPr>
-              <a:t>E perdoar a todo que</a:t>
+              <a:t>この十字架こ - そ救 - い     注がれた主の愛</a:t>
             </a:r>
           </a:p>
         </p:txBody>
@@ -4027,8 +3821,8 @@
         </p:nvSpPr>
         <p:spPr>
           <a:xfrm>
-            <a:off x="594360" y="2980944"/>
-            <a:ext cx="11002975" cy="347472"/>
+            <a:off x="640080" y="2418588"/>
+            <a:ext cx="10911535" cy="365760"/>
           </a:xfrm>
           <a:prstGeom prst="rect">
             <a:avLst/>
@@ -4043,13 +3837,13 @@
           <a:p>
             <a:pPr algn="ctr"/>
             <a:r>
-              <a:rPr sz="2200" b="0" i="1">
-                <a:solidFill>
-                  <a:srgbClr val="8C8C8C"/>
+              <a:rPr sz="2400" b="0" i="1">
+                <a:solidFill>
+                  <a:srgbClr val="AAAAAA"/>
                 </a:solidFill>
                 <a:latin typeface="Arial"/>
               </a:rPr>
-              <a:t/>
+              <a:t>kono jyuujika koso sukui  sosogareta shu no ai</a:t>
             </a:r>
           </a:p>
         </p:txBody>
@@ -4062,8 +3856,8 @@
         </p:nvSpPr>
         <p:spPr>
           <a:xfrm>
-            <a:off x="594360" y="3529584"/>
-            <a:ext cx="11002975" cy="685800"/>
+            <a:off x="640080" y="2985516"/>
+            <a:ext cx="10911535" cy="731520"/>
           </a:xfrm>
           <a:prstGeom prst="rect">
             <a:avLst/>
@@ -4078,13 +3872,13 @@
           <a:p>
             <a:pPr algn="ctr"/>
             <a:r>
-              <a:rPr sz="4400" b="1" i="0">
+              <a:rPr sz="4600" b="1" i="0">
                 <a:solidFill>
                   <a:srgbClr val="FFFFFF"/>
                 </a:solidFill>
                 <a:latin typeface="Arial"/>
               </a:rPr>
-              <a:t>Se entregar a Ti</a:t>
+              <a:t>心  -  から　ハレル-ヤ     神をたたえる</a:t>
             </a:r>
           </a:p>
         </p:txBody>
@@ -4097,8 +3891,8 @@
         </p:nvSpPr>
         <p:spPr>
           <a:xfrm>
-            <a:off x="594360" y="4251960"/>
-            <a:ext cx="11002975" cy="347472"/>
+            <a:off x="640080" y="3753612"/>
+            <a:ext cx="10911535" cy="365760"/>
           </a:xfrm>
           <a:prstGeom prst="rect">
             <a:avLst/>
@@ -4113,13 +3907,83 @@
           <a:p>
             <a:pPr algn="ctr"/>
             <a:r>
-              <a:rPr sz="2200" b="0" i="1">
-                <a:solidFill>
-                  <a:srgbClr val="8C8C8C"/>
+              <a:rPr sz="2400" b="0" i="1">
+                <a:solidFill>
+                  <a:srgbClr val="AAAAAA"/>
                 </a:solidFill>
                 <a:latin typeface="Arial"/>
               </a:rPr>
-              <a:t/>
+              <a:t>kokoro kara halelujah  kami wo tataeru</a:t>
+            </a:r>
+          </a:p>
+        </p:txBody>
+      </p:sp>
+      <p:sp>
+        <p:nvSpPr>
+          <p:cNvPr id="6" name="TextBox 5"/>
+          <p:cNvSpPr txBox="1"/>
+          <p:nvPr/>
+        </p:nvSpPr>
+        <p:spPr>
+          <a:xfrm>
+            <a:off x="640080" y="4530852"/>
+            <a:ext cx="10911535" cy="310896"/>
+          </a:xfrm>
+          <a:prstGeom prst="rect">
+            <a:avLst/>
+          </a:prstGeom>
+          <a:noFill/>
+        </p:spPr>
+        <p:txBody>
+          <a:bodyPr wrap="square">
+            <a:spAutoFit/>
+          </a:bodyPr>
+          <a:lstStyle/>
+          <a:p>
+            <a:pPr algn="ctr"/>
+            <a:r>
+              <a:rPr sz="2000" b="0" i="1">
+                <a:solidFill>
+                  <a:srgbClr val="828282"/>
+                </a:solidFill>
+                <a:latin typeface="Arial"/>
+              </a:rPr>
+              <a:t>Em silêncio suportou</a:t>
+            </a:r>
+          </a:p>
+        </p:txBody>
+      </p:sp>
+      <p:sp>
+        <p:nvSpPr>
+          <p:cNvPr id="7" name="TextBox 6"/>
+          <p:cNvSpPr txBox="1"/>
+          <p:nvPr/>
+        </p:nvSpPr>
+        <p:spPr>
+          <a:xfrm>
+            <a:off x="640080" y="4896612"/>
+            <a:ext cx="10911535" cy="310896"/>
+          </a:xfrm>
+          <a:prstGeom prst="rect">
+            <a:avLst/>
+          </a:prstGeom>
+          <a:noFill/>
+        </p:spPr>
+        <p:txBody>
+          <a:bodyPr wrap="square">
+            <a:spAutoFit/>
+          </a:bodyPr>
+          <a:lstStyle/>
+          <a:p>
+            <a:pPr algn="ctr"/>
+            <a:r>
+              <a:rPr sz="2000" b="0" i="1">
+                <a:solidFill>
+                  <a:srgbClr val="828282"/>
+                </a:solidFill>
+                <a:latin typeface="Arial"/>
+              </a:rPr>
+              <a:t>Açoite, escárnio e dor</a:t>
             </a:r>
           </a:p>
         </p:txBody>
@@ -4158,8 +4022,8 @@
         </p:nvSpPr>
         <p:spPr>
           <a:xfrm>
-            <a:off x="594360" y="2258568"/>
-            <a:ext cx="11002975" cy="685800"/>
+            <a:off x="640080" y="2052828"/>
+            <a:ext cx="10911535" cy="731520"/>
           </a:xfrm>
           <a:prstGeom prst="rect">
             <a:avLst/>
@@ -4174,13 +4038,13 @@
           <a:p>
             <a:pPr algn="ctr"/>
             <a:r>
-              <a:rPr sz="4400" b="1" i="0">
+              <a:rPr sz="4800" b="1" i="0">
                 <a:solidFill>
                   <a:srgbClr val="FFFFFF"/>
                 </a:solidFill>
                 <a:latin typeface="Arial"/>
               </a:rPr>
-              <a:t>Numa rude cruz me salvaste</a:t>
+              <a:t>Unigênito de Deus</a:t>
             </a:r>
           </a:p>
         </p:txBody>
@@ -4193,8 +4057,8 @@
         </p:nvSpPr>
         <p:spPr>
           <a:xfrm>
-            <a:off x="594360" y="2980944"/>
-            <a:ext cx="11002975" cy="347472"/>
+            <a:off x="640080" y="2985516"/>
+            <a:ext cx="10911535" cy="731520"/>
           </a:xfrm>
           <a:prstGeom prst="rect">
             <a:avLst/>
@@ -4209,83 +4073,13 @@
           <a:p>
             <a:pPr algn="ctr"/>
             <a:r>
-              <a:rPr sz="2200" b="0" i="1">
-                <a:solidFill>
-                  <a:srgbClr val="8C8C8C"/>
+              <a:rPr sz="4800" b="1" i="0">
+                <a:solidFill>
+                  <a:srgbClr val="FFFFFF"/>
                 </a:solidFill>
                 <a:latin typeface="Arial"/>
               </a:rPr>
-              <a:t/>
-            </a:r>
-          </a:p>
-        </p:txBody>
-      </p:sp>
-      <p:sp>
-        <p:nvSpPr>
-          <p:cNvPr id="4" name="TextBox 3"/>
-          <p:cNvSpPr txBox="1"/>
-          <p:nvPr/>
-        </p:nvSpPr>
-        <p:spPr>
-          <a:xfrm>
-            <a:off x="594360" y="3529584"/>
-            <a:ext cx="11002975" cy="685800"/>
-          </a:xfrm>
-          <a:prstGeom prst="rect">
-            <a:avLst/>
-          </a:prstGeom>
-          <a:noFill/>
-        </p:spPr>
-        <p:txBody>
-          <a:bodyPr wrap="square">
-            <a:spAutoFit/>
-          </a:bodyPr>
-          <a:lstStyle/>
-          <a:p>
-            <a:pPr algn="ctr"/>
-            <a:r>
-              <a:rPr sz="4400" b="1" i="0">
-                <a:solidFill>
-                  <a:srgbClr val="FFFFFF"/>
-                </a:solidFill>
-                <a:latin typeface="Arial"/>
-              </a:rPr>
-              <a:t>Derramaste ali teu amor</a:t>
-            </a:r>
-          </a:p>
-        </p:txBody>
-      </p:sp>
-      <p:sp>
-        <p:nvSpPr>
-          <p:cNvPr id="5" name="TextBox 4"/>
-          <p:cNvSpPr txBox="1"/>
-          <p:nvPr/>
-        </p:nvSpPr>
-        <p:spPr>
-          <a:xfrm>
-            <a:off x="594360" y="4251960"/>
-            <a:ext cx="11002975" cy="347472"/>
-          </a:xfrm>
-          <a:prstGeom prst="rect">
-            <a:avLst/>
-          </a:prstGeom>
-          <a:noFill/>
-        </p:spPr>
-        <p:txBody>
-          <a:bodyPr wrap="square">
-            <a:spAutoFit/>
-          </a:bodyPr>
-          <a:lstStyle/>
-          <a:p>
-            <a:pPr algn="ctr"/>
-            <a:r>
-              <a:rPr sz="2200" b="0" i="1">
-                <a:solidFill>
-                  <a:srgbClr val="8C8C8C"/>
-                </a:solidFill>
-                <a:latin typeface="Arial"/>
-              </a:rPr>
-              <a:t/>
+              <a:t>Vieste redimir</a:t>
             </a:r>
           </a:p>
         </p:txBody>
@@ -4324,8 +4118,8 @@
         </p:nvSpPr>
         <p:spPr>
           <a:xfrm>
-            <a:off x="594360" y="2258568"/>
-            <a:ext cx="11002975" cy="685800"/>
+            <a:off x="640080" y="2052828"/>
+            <a:ext cx="10911535" cy="731520"/>
           </a:xfrm>
           <a:prstGeom prst="rect">
             <a:avLst/>
@@ -4340,7 +4134,391 @@
           <a:p>
             <a:pPr algn="ctr"/>
             <a:r>
-              <a:rPr sz="4400" b="1" i="0">
+              <a:rPr sz="4800" b="1" i="0">
+                <a:solidFill>
+                  <a:srgbClr val="FFFFFF"/>
+                </a:solidFill>
+                <a:latin typeface="Arial"/>
+              </a:rPr>
+              <a:t>E perdoar a todo que</a:t>
+            </a:r>
+          </a:p>
+        </p:txBody>
+      </p:sp>
+      <p:sp>
+        <p:nvSpPr>
+          <p:cNvPr id="3" name="TextBox 2"/>
+          <p:cNvSpPr txBox="1"/>
+          <p:nvPr/>
+        </p:nvSpPr>
+        <p:spPr>
+          <a:xfrm>
+            <a:off x="640080" y="2985516"/>
+            <a:ext cx="10911535" cy="731520"/>
+          </a:xfrm>
+          <a:prstGeom prst="rect">
+            <a:avLst/>
+          </a:prstGeom>
+          <a:noFill/>
+        </p:spPr>
+        <p:txBody>
+          <a:bodyPr wrap="square">
+            <a:spAutoFit/>
+          </a:bodyPr>
+          <a:lstStyle/>
+          <a:p>
+            <a:pPr algn="ctr"/>
+            <a:r>
+              <a:rPr sz="4800" b="1" i="0">
+                <a:solidFill>
+                  <a:srgbClr val="FFFFFF"/>
+                </a:solidFill>
+                <a:latin typeface="Arial"/>
+              </a:rPr>
+              <a:t>Se entregar a Ti</a:t>
+            </a:r>
+          </a:p>
+        </p:txBody>
+      </p:sp>
+    </p:spTree>
+  </p:cSld>
+  <p:clrMapOvr>
+    <a:masterClrMapping/>
+  </p:clrMapOvr>
+</p:sld>
+</file>
+
+<file path=ppt/slides/slide16.xml><?xml version="1.0" encoding="utf-8"?>
+<p:sld xmlns:a="http://schemas.openxmlformats.org/drawingml/2006/main" xmlns:p="http://schemas.openxmlformats.org/presentationml/2006/main" xmlns:r="http://schemas.openxmlformats.org/officeDocument/2006/relationships">
+  <p:cSld>
+    <p:bg>
+      <p:bgPr>
+        <a:solidFill>
+          <a:srgbClr val="000000"/>
+        </a:solidFill>
+        <a:effectLst/>
+      </p:bgPr>
+    </p:bg>
+    <p:spTree>
+      <p:nvGrpSpPr>
+        <p:cNvPr id="1" name=""/>
+        <p:cNvGrpSpPr/>
+        <p:nvPr/>
+      </p:nvGrpSpPr>
+      <p:grpSpPr/>
+      <p:sp>
+        <p:nvSpPr>
+          <p:cNvPr id="2" name="TextBox 1"/>
+          <p:cNvSpPr txBox="1"/>
+          <p:nvPr/>
+        </p:nvSpPr>
+        <p:spPr>
+          <a:xfrm>
+            <a:off x="640080" y="2052828"/>
+            <a:ext cx="10911535" cy="731520"/>
+          </a:xfrm>
+          <a:prstGeom prst="rect">
+            <a:avLst/>
+          </a:prstGeom>
+          <a:noFill/>
+        </p:spPr>
+        <p:txBody>
+          <a:bodyPr wrap="square">
+            <a:spAutoFit/>
+          </a:bodyPr>
+          <a:lstStyle/>
+          <a:p>
+            <a:pPr algn="ctr"/>
+            <a:r>
+              <a:rPr sz="4800" b="1" i="0">
+                <a:solidFill>
+                  <a:srgbClr val="FFFFFF"/>
+                </a:solidFill>
+                <a:latin typeface="Arial"/>
+              </a:rPr>
+              <a:t>Em silêncio suportou</a:t>
+            </a:r>
+          </a:p>
+        </p:txBody>
+      </p:sp>
+      <p:sp>
+        <p:nvSpPr>
+          <p:cNvPr id="3" name="TextBox 2"/>
+          <p:cNvSpPr txBox="1"/>
+          <p:nvPr/>
+        </p:nvSpPr>
+        <p:spPr>
+          <a:xfrm>
+            <a:off x="640080" y="2985516"/>
+            <a:ext cx="10911535" cy="731520"/>
+          </a:xfrm>
+          <a:prstGeom prst="rect">
+            <a:avLst/>
+          </a:prstGeom>
+          <a:noFill/>
+        </p:spPr>
+        <p:txBody>
+          <a:bodyPr wrap="square">
+            <a:spAutoFit/>
+          </a:bodyPr>
+          <a:lstStyle/>
+          <a:p>
+            <a:pPr algn="ctr"/>
+            <a:r>
+              <a:rPr sz="4800" b="1" i="0">
+                <a:solidFill>
+                  <a:srgbClr val="FFFFFF"/>
+                </a:solidFill>
+                <a:latin typeface="Arial"/>
+              </a:rPr>
+              <a:t>Açoite, escárnio e dor</a:t>
+            </a:r>
+          </a:p>
+        </p:txBody>
+      </p:sp>
+    </p:spTree>
+  </p:cSld>
+  <p:clrMapOvr>
+    <a:masterClrMapping/>
+  </p:clrMapOvr>
+</p:sld>
+</file>
+
+<file path=ppt/slides/slide17.xml><?xml version="1.0" encoding="utf-8"?>
+<p:sld xmlns:a="http://schemas.openxmlformats.org/drawingml/2006/main" xmlns:p="http://schemas.openxmlformats.org/presentationml/2006/main" xmlns:r="http://schemas.openxmlformats.org/officeDocument/2006/relationships">
+  <p:cSld>
+    <p:bg>
+      <p:bgPr>
+        <a:solidFill>
+          <a:srgbClr val="000000"/>
+        </a:solidFill>
+        <a:effectLst/>
+      </p:bgPr>
+    </p:bg>
+    <p:spTree>
+      <p:nvGrpSpPr>
+        <p:cNvPr id="1" name=""/>
+        <p:cNvGrpSpPr/>
+        <p:nvPr/>
+      </p:nvGrpSpPr>
+      <p:grpSpPr/>
+      <p:sp>
+        <p:nvSpPr>
+          <p:cNvPr id="2" name="TextBox 1"/>
+          <p:cNvSpPr txBox="1"/>
+          <p:nvPr/>
+        </p:nvSpPr>
+        <p:spPr>
+          <a:xfrm>
+            <a:off x="640080" y="2052828"/>
+            <a:ext cx="10911535" cy="731520"/>
+          </a:xfrm>
+          <a:prstGeom prst="rect">
+            <a:avLst/>
+          </a:prstGeom>
+          <a:noFill/>
+        </p:spPr>
+        <p:txBody>
+          <a:bodyPr wrap="square">
+            <a:spAutoFit/>
+          </a:bodyPr>
+          <a:lstStyle/>
+          <a:p>
+            <a:pPr algn="ctr"/>
+            <a:r>
+              <a:rPr sz="4800" b="1" i="0">
+                <a:solidFill>
+                  <a:srgbClr val="FFFFFF"/>
+                </a:solidFill>
+                <a:latin typeface="Arial"/>
+              </a:rPr>
+              <a:t>E em obediência ao Pai</a:t>
+            </a:r>
+          </a:p>
+        </p:txBody>
+      </p:sp>
+      <p:sp>
+        <p:nvSpPr>
+          <p:cNvPr id="3" name="TextBox 2"/>
+          <p:cNvSpPr txBox="1"/>
+          <p:nvPr/>
+        </p:nvSpPr>
+        <p:spPr>
+          <a:xfrm>
+            <a:off x="640080" y="2985516"/>
+            <a:ext cx="10911535" cy="731520"/>
+          </a:xfrm>
+          <a:prstGeom prst="rect">
+            <a:avLst/>
+          </a:prstGeom>
+          <a:noFill/>
+        </p:spPr>
+        <p:txBody>
+          <a:bodyPr wrap="square">
+            <a:spAutoFit/>
+          </a:bodyPr>
+          <a:lstStyle/>
+          <a:p>
+            <a:pPr algn="ctr"/>
+            <a:r>
+              <a:rPr sz="4800" b="1" i="0">
+                <a:solidFill>
+                  <a:srgbClr val="FFFFFF"/>
+                </a:solidFill>
+                <a:latin typeface="Arial"/>
+              </a:rPr>
+              <a:t>Na cruz se entregou</a:t>
+            </a:r>
+          </a:p>
+        </p:txBody>
+      </p:sp>
+    </p:spTree>
+  </p:cSld>
+  <p:clrMapOvr>
+    <a:masterClrMapping/>
+  </p:clrMapOvr>
+</p:sld>
+</file>
+
+<file path=ppt/slides/slide18.xml><?xml version="1.0" encoding="utf-8"?>
+<p:sld xmlns:a="http://schemas.openxmlformats.org/drawingml/2006/main" xmlns:p="http://schemas.openxmlformats.org/presentationml/2006/main" xmlns:r="http://schemas.openxmlformats.org/officeDocument/2006/relationships">
+  <p:cSld>
+    <p:bg>
+      <p:bgPr>
+        <a:solidFill>
+          <a:srgbClr val="000000"/>
+        </a:solidFill>
+        <a:effectLst/>
+      </p:bgPr>
+    </p:bg>
+    <p:spTree>
+      <p:nvGrpSpPr>
+        <p:cNvPr id="1" name=""/>
+        <p:cNvGrpSpPr/>
+        <p:nvPr/>
+      </p:nvGrpSpPr>
+      <p:grpSpPr/>
+      <p:sp>
+        <p:nvSpPr>
+          <p:cNvPr id="2" name="TextBox 1"/>
+          <p:cNvSpPr txBox="1"/>
+          <p:nvPr/>
+        </p:nvSpPr>
+        <p:spPr>
+          <a:xfrm>
+            <a:off x="640080" y="2052828"/>
+            <a:ext cx="10911535" cy="731520"/>
+          </a:xfrm>
+          <a:prstGeom prst="rect">
+            <a:avLst/>
+          </a:prstGeom>
+          <a:noFill/>
+        </p:spPr>
+        <p:txBody>
+          <a:bodyPr wrap="square">
+            <a:spAutoFit/>
+          </a:bodyPr>
+          <a:lstStyle/>
+          <a:p>
+            <a:pPr algn="ctr"/>
+            <a:r>
+              <a:rPr sz="4800" b="1" i="0">
+                <a:solidFill>
+                  <a:srgbClr val="FFFFFF"/>
+                </a:solidFill>
+                <a:latin typeface="Arial"/>
+              </a:rPr>
+              <a:t>Numa rude cruz me salvaste</a:t>
+            </a:r>
+          </a:p>
+        </p:txBody>
+      </p:sp>
+      <p:sp>
+        <p:nvSpPr>
+          <p:cNvPr id="3" name="TextBox 2"/>
+          <p:cNvSpPr txBox="1"/>
+          <p:nvPr/>
+        </p:nvSpPr>
+        <p:spPr>
+          <a:xfrm>
+            <a:off x="640080" y="2985516"/>
+            <a:ext cx="10911535" cy="731520"/>
+          </a:xfrm>
+          <a:prstGeom prst="rect">
+            <a:avLst/>
+          </a:prstGeom>
+          <a:noFill/>
+        </p:spPr>
+        <p:txBody>
+          <a:bodyPr wrap="square">
+            <a:spAutoFit/>
+          </a:bodyPr>
+          <a:lstStyle/>
+          <a:p>
+            <a:pPr algn="ctr"/>
+            <a:r>
+              <a:rPr sz="4800" b="1" i="0">
+                <a:solidFill>
+                  <a:srgbClr val="FFFFFF"/>
+                </a:solidFill>
+                <a:latin typeface="Arial"/>
+              </a:rPr>
+              <a:t>Derramaste ali teu amor</a:t>
+            </a:r>
+          </a:p>
+        </p:txBody>
+      </p:sp>
+    </p:spTree>
+  </p:cSld>
+  <p:clrMapOvr>
+    <a:masterClrMapping/>
+  </p:clrMapOvr>
+</p:sld>
+</file>
+
+<file path=ppt/slides/slide19.xml><?xml version="1.0" encoding="utf-8"?>
+<p:sld xmlns:a="http://schemas.openxmlformats.org/drawingml/2006/main" xmlns:p="http://schemas.openxmlformats.org/presentationml/2006/main" xmlns:r="http://schemas.openxmlformats.org/officeDocument/2006/relationships">
+  <p:cSld>
+    <p:bg>
+      <p:bgPr>
+        <a:solidFill>
+          <a:srgbClr val="000000"/>
+        </a:solidFill>
+        <a:effectLst/>
+      </p:bgPr>
+    </p:bg>
+    <p:spTree>
+      <p:nvGrpSpPr>
+        <p:cNvPr id="1" name=""/>
+        <p:cNvGrpSpPr/>
+        <p:nvPr/>
+      </p:nvGrpSpPr>
+      <p:grpSpPr/>
+      <p:sp>
+        <p:nvSpPr>
+          <p:cNvPr id="2" name="TextBox 1"/>
+          <p:cNvSpPr txBox="1"/>
+          <p:nvPr/>
+        </p:nvSpPr>
+        <p:spPr>
+          <a:xfrm>
+            <a:off x="640080" y="2052828"/>
+            <a:ext cx="10911535" cy="731520"/>
+          </a:xfrm>
+          <a:prstGeom prst="rect">
+            <a:avLst/>
+          </a:prstGeom>
+          <a:noFill/>
+        </p:spPr>
+        <p:txBody>
+          <a:bodyPr wrap="square">
+            <a:spAutoFit/>
+          </a:bodyPr>
+          <a:lstStyle/>
+          <a:p>
+            <a:pPr algn="ctr"/>
+            <a:r>
+              <a:rPr sz="4800" b="1" i="0">
                 <a:solidFill>
                   <a:srgbClr val="FFFFFF"/>
                 </a:solidFill>
@@ -4359,8 +4537,8 @@
         </p:nvSpPr>
         <p:spPr>
           <a:xfrm>
-            <a:off x="594360" y="2980944"/>
-            <a:ext cx="11002975" cy="347472"/>
+            <a:off x="640080" y="2985516"/>
+            <a:ext cx="10911535" cy="731520"/>
           </a:xfrm>
           <a:prstGeom prst="rect">
             <a:avLst/>
@@ -4375,83 +4553,13 @@
           <a:p>
             <a:pPr algn="ctr"/>
             <a:r>
-              <a:rPr sz="2200" b="0" i="1">
-                <a:solidFill>
-                  <a:srgbClr val="8C8C8C"/>
-                </a:solidFill>
-                <a:latin typeface="Arial"/>
-              </a:rPr>
-              <a:t/>
-            </a:r>
-          </a:p>
-        </p:txBody>
-      </p:sp>
-      <p:sp>
-        <p:nvSpPr>
-          <p:cNvPr id="4" name="TextBox 3"/>
-          <p:cNvSpPr txBox="1"/>
-          <p:nvPr/>
-        </p:nvSpPr>
-        <p:spPr>
-          <a:xfrm>
-            <a:off x="594360" y="3529584"/>
-            <a:ext cx="11002975" cy="685800"/>
-          </a:xfrm>
-          <a:prstGeom prst="rect">
-            <a:avLst/>
-          </a:prstGeom>
-          <a:noFill/>
-        </p:spPr>
-        <p:txBody>
-          <a:bodyPr wrap="square">
-            <a:spAutoFit/>
-          </a:bodyPr>
-          <a:lstStyle/>
-          <a:p>
-            <a:pPr algn="ctr"/>
-            <a:r>
-              <a:rPr sz="4400" b="1" i="0">
+              <a:rPr sz="4800" b="1" i="0">
                 <a:solidFill>
                   <a:srgbClr val="FFFFFF"/>
                 </a:solidFill>
                 <a:latin typeface="Arial"/>
               </a:rPr>
               <a:t>Glória e honra a ti, Senhor</a:t>
-            </a:r>
-          </a:p>
-        </p:txBody>
-      </p:sp>
-      <p:sp>
-        <p:nvSpPr>
-          <p:cNvPr id="5" name="TextBox 4"/>
-          <p:cNvSpPr txBox="1"/>
-          <p:nvPr/>
-        </p:nvSpPr>
-        <p:spPr>
-          <a:xfrm>
-            <a:off x="594360" y="4251960"/>
-            <a:ext cx="11002975" cy="347472"/>
-          </a:xfrm>
-          <a:prstGeom prst="rect">
-            <a:avLst/>
-          </a:prstGeom>
-          <a:noFill/>
-        </p:spPr>
-        <p:txBody>
-          <a:bodyPr wrap="square">
-            <a:spAutoFit/>
-          </a:bodyPr>
-          <a:lstStyle/>
-          <a:p>
-            <a:pPr algn="ctr"/>
-            <a:r>
-              <a:rPr sz="2200" b="0" i="1">
-                <a:solidFill>
-                  <a:srgbClr val="8C8C8C"/>
-                </a:solidFill>
-                <a:latin typeface="Arial"/>
-              </a:rPr>
-              <a:t/>
             </a:r>
           </a:p>
         </p:txBody>
@@ -4490,8 +4598,8 @@
         </p:nvSpPr>
         <p:spPr>
           <a:xfrm>
-            <a:off x="594360" y="1837944"/>
-            <a:ext cx="11002975" cy="685800"/>
+            <a:off x="640080" y="1650492"/>
+            <a:ext cx="10911535" cy="731520"/>
           </a:xfrm>
           <a:prstGeom prst="rect">
             <a:avLst/>
@@ -4506,7 +4614,7 @@
           <a:p>
             <a:pPr algn="ctr"/>
             <a:r>
-              <a:rPr sz="4400" b="1" i="0">
+              <a:rPr sz="4800" b="1" i="0">
                 <a:solidFill>
                   <a:srgbClr val="FFFFFF"/>
                 </a:solidFill>
@@ -4525,8 +4633,8 @@
         </p:nvSpPr>
         <p:spPr>
           <a:xfrm>
-            <a:off x="594360" y="2560320"/>
-            <a:ext cx="11002975" cy="384048"/>
+            <a:off x="640080" y="2418588"/>
+            <a:ext cx="10911535" cy="365760"/>
           </a:xfrm>
           <a:prstGeom prst="rect">
             <a:avLst/>
@@ -4543,7 +4651,7 @@
             <a:r>
               <a:rPr sz="2400" b="0" i="1">
                 <a:solidFill>
-                  <a:srgbClr val="B4B4B4"/>
+                  <a:srgbClr val="AAAAAA"/>
                 </a:solidFill>
                 <a:latin typeface="Arial"/>
               </a:rPr>
@@ -4560,8 +4668,8 @@
         </p:nvSpPr>
         <p:spPr>
           <a:xfrm>
-            <a:off x="594360" y="2980944"/>
-            <a:ext cx="11002975" cy="347472"/>
+            <a:off x="640080" y="2985516"/>
+            <a:ext cx="10911535" cy="731520"/>
           </a:xfrm>
           <a:prstGeom prst="rect">
             <a:avLst/>
@@ -4576,13 +4684,13 @@
           <a:p>
             <a:pPr algn="ctr"/>
             <a:r>
-              <a:rPr sz="2000" b="0" i="1">
-                <a:solidFill>
-                  <a:srgbClr val="8C8C8C"/>
+              <a:rPr sz="4800" b="1" i="0">
+                <a:solidFill>
+                  <a:srgbClr val="FFFFFF"/>
                 </a:solidFill>
                 <a:latin typeface="Arial"/>
               </a:rPr>
-              <a:t/>
+              <a:t>委ね - て受けた    とげのかんむり</a:t>
             </a:r>
           </a:p>
         </p:txBody>
@@ -4595,8 +4703,8 @@
         </p:nvSpPr>
         <p:spPr>
           <a:xfrm>
-            <a:off x="594360" y="3529584"/>
-            <a:ext cx="11002975" cy="685800"/>
+            <a:off x="640080" y="3753612"/>
+            <a:ext cx="10911535" cy="365760"/>
           </a:xfrm>
           <a:prstGeom prst="rect">
             <a:avLst/>
@@ -4611,13 +4719,13 @@
           <a:p>
             <a:pPr algn="ctr"/>
             <a:r>
-              <a:rPr sz="4400" b="1" i="0">
-                <a:solidFill>
-                  <a:srgbClr val="FFFFFF"/>
+              <a:rPr sz="2400" b="0" i="1">
+                <a:solidFill>
+                  <a:srgbClr val="AAAAAA"/>
                 </a:solidFill>
                 <a:latin typeface="Arial"/>
               </a:rPr>
-              <a:t>委ね - て受けた    とげのかんむり</a:t>
+              <a:t>yudanete uketa  toge no kanmuri</a:t>
             </a:r>
           </a:p>
         </p:txBody>
@@ -4630,8 +4738,8 @@
         </p:nvSpPr>
         <p:spPr>
           <a:xfrm>
-            <a:off x="594360" y="4251960"/>
-            <a:ext cx="11002975" cy="384048"/>
+            <a:off x="640080" y="4530852"/>
+            <a:ext cx="10911535" cy="310896"/>
           </a:xfrm>
           <a:prstGeom prst="rect">
             <a:avLst/>
@@ -4646,13 +4754,13 @@
           <a:p>
             <a:pPr algn="ctr"/>
             <a:r>
-              <a:rPr sz="2400" b="0" i="1">
-                <a:solidFill>
-                  <a:srgbClr val="B4B4B4"/>
+              <a:rPr sz="2000" b="0" i="1">
+                <a:solidFill>
+                  <a:srgbClr val="828282"/>
                 </a:solidFill>
                 <a:latin typeface="Arial"/>
               </a:rPr>
-              <a:t>yudanete uketa  toge no kanmuri</a:t>
+              <a:t>O Cordeiro que sofreu</a:t>
             </a:r>
           </a:p>
         </p:txBody>
@@ -4665,8 +4773,8 @@
         </p:nvSpPr>
         <p:spPr>
           <a:xfrm>
-            <a:off x="594360" y="4672584"/>
-            <a:ext cx="11002975" cy="347472"/>
+            <a:off x="640080" y="4896612"/>
+            <a:ext cx="10911535" cy="310896"/>
           </a:xfrm>
           <a:prstGeom prst="rect">
             <a:avLst/>
@@ -4683,11 +4791,11 @@
             <a:r>
               <a:rPr sz="2000" b="0" i="1">
                 <a:solidFill>
-                  <a:srgbClr val="8C8C8C"/>
+                  <a:srgbClr val="828282"/>
                 </a:solidFill>
                 <a:latin typeface="Arial"/>
               </a:rPr>
-              <a:t/>
+              <a:t>Traído pelos seus</a:t>
             </a:r>
           </a:p>
         </p:txBody>
@@ -4726,8 +4834,8 @@
         </p:nvSpPr>
         <p:spPr>
           <a:xfrm>
-            <a:off x="594360" y="1837944"/>
-            <a:ext cx="11002975" cy="685800"/>
+            <a:off x="640080" y="1650492"/>
+            <a:ext cx="10911535" cy="731520"/>
           </a:xfrm>
           <a:prstGeom prst="rect">
             <a:avLst/>
@@ -4742,7 +4850,7 @@
           <a:p>
             <a:pPr algn="ctr"/>
             <a:r>
-              <a:rPr sz="3911" b="1" i="0">
+              <a:rPr sz="4200" b="1" i="0">
                 <a:solidFill>
                   <a:srgbClr val="FFFFFF"/>
                 </a:solidFill>
@@ -4761,8 +4869,8 @@
         </p:nvSpPr>
         <p:spPr>
           <a:xfrm>
-            <a:off x="594360" y="2560320"/>
-            <a:ext cx="11002975" cy="384048"/>
+            <a:off x="640080" y="2418588"/>
+            <a:ext cx="10911535" cy="365760"/>
           </a:xfrm>
           <a:prstGeom prst="rect">
             <a:avLst/>
@@ -4777,9 +4885,9 @@
           <a:p>
             <a:pPr algn="ctr"/>
             <a:r>
-              <a:rPr sz="2144" b="0" i="1">
-                <a:solidFill>
-                  <a:srgbClr val="B4B4B4"/>
+              <a:rPr sz="2400" b="0" i="1">
+                <a:solidFill>
+                  <a:srgbClr val="AAAAAA"/>
                 </a:solidFill>
                 <a:latin typeface="Arial"/>
               </a:rPr>
@@ -4796,8 +4904,8 @@
         </p:nvSpPr>
         <p:spPr>
           <a:xfrm>
-            <a:off x="594360" y="2980944"/>
-            <a:ext cx="11002975" cy="347472"/>
+            <a:off x="640080" y="2985516"/>
+            <a:ext cx="10911535" cy="731520"/>
           </a:xfrm>
           <a:prstGeom prst="rect">
             <a:avLst/>
@@ -4812,13 +4920,13 @@
           <a:p>
             <a:pPr algn="ctr"/>
             <a:r>
-              <a:rPr sz="2000" b="0" i="1">
-                <a:solidFill>
-                  <a:srgbClr val="8C8C8C"/>
+              <a:rPr sz="4800" b="1" i="0">
+                <a:solidFill>
+                  <a:srgbClr val="FFFFFF"/>
                 </a:solidFill>
                 <a:latin typeface="Arial"/>
               </a:rPr>
-              <a:t/>
+              <a:t>心  -  から　ハレル -ヤ 神をたたえる</a:t>
             </a:r>
           </a:p>
         </p:txBody>
@@ -4831,8 +4939,8 @@
         </p:nvSpPr>
         <p:spPr>
           <a:xfrm>
-            <a:off x="594360" y="3529584"/>
-            <a:ext cx="11002975" cy="685800"/>
+            <a:off x="640080" y="3753612"/>
+            <a:ext cx="10911535" cy="365760"/>
           </a:xfrm>
           <a:prstGeom prst="rect">
             <a:avLst/>
@@ -4847,13 +4955,13 @@
           <a:p>
             <a:pPr algn="ctr"/>
             <a:r>
-              <a:rPr sz="4400" b="1" i="0">
-                <a:solidFill>
-                  <a:srgbClr val="FFFFFF"/>
+              <a:rPr sz="2400" b="0" i="1">
+                <a:solidFill>
+                  <a:srgbClr val="AAAAAA"/>
                 </a:solidFill>
                 <a:latin typeface="Arial"/>
               </a:rPr>
-              <a:t>心  -  から　ハレル -ヤ 神をたたえる</a:t>
+              <a:t>kokoro kara halelujah kami wo tataeru</a:t>
             </a:r>
           </a:p>
         </p:txBody>
@@ -4866,8 +4974,8 @@
         </p:nvSpPr>
         <p:spPr>
           <a:xfrm>
-            <a:off x="594360" y="4251960"/>
-            <a:ext cx="11002975" cy="384048"/>
+            <a:off x="640080" y="4530852"/>
+            <a:ext cx="10911535" cy="310896"/>
           </a:xfrm>
           <a:prstGeom prst="rect">
             <a:avLst/>
@@ -4882,13 +4990,13 @@
           <a:p>
             <a:pPr algn="ctr"/>
             <a:r>
-              <a:rPr sz="2400" b="0" i="1">
-                <a:solidFill>
-                  <a:srgbClr val="B4B4B4"/>
+              <a:rPr sz="2000" b="0" i="1">
+                <a:solidFill>
+                  <a:srgbClr val="828282"/>
                 </a:solidFill>
                 <a:latin typeface="Arial"/>
               </a:rPr>
-              <a:t>kokoro kara halelujah kami wo tataeru</a:t>
+              <a:t>Em silêncio suportou</a:t>
             </a:r>
           </a:p>
         </p:txBody>
@@ -4901,8 +5009,8 @@
         </p:nvSpPr>
         <p:spPr>
           <a:xfrm>
-            <a:off x="594360" y="4672584"/>
-            <a:ext cx="11002975" cy="347472"/>
+            <a:off x="640080" y="4896612"/>
+            <a:ext cx="10911535" cy="310896"/>
           </a:xfrm>
           <a:prstGeom prst="rect">
             <a:avLst/>
@@ -4919,11 +5027,11 @@
             <a:r>
               <a:rPr sz="2000" b="0" i="1">
                 <a:solidFill>
-                  <a:srgbClr val="8C8C8C"/>
+                  <a:srgbClr val="828282"/>
                 </a:solidFill>
                 <a:latin typeface="Arial"/>
               </a:rPr>
-              <a:t/>
+              <a:t>Açoite, escárnio e dor</a:t>
             </a:r>
           </a:p>
         </p:txBody>
@@ -4962,8 +5070,8 @@
         </p:nvSpPr>
         <p:spPr>
           <a:xfrm>
-            <a:off x="594360" y="2258568"/>
-            <a:ext cx="11002975" cy="685800"/>
+            <a:off x="640080" y="2052828"/>
+            <a:ext cx="10911535" cy="731520"/>
           </a:xfrm>
           <a:prstGeom prst="rect">
             <a:avLst/>
@@ -4978,7 +5086,7 @@
           <a:p>
             <a:pPr algn="ctr"/>
             <a:r>
-              <a:rPr sz="4400" b="1" i="0">
+              <a:rPr sz="4800" b="1" i="0">
                 <a:solidFill>
                   <a:srgbClr val="FFFFFF"/>
                 </a:solidFill>
@@ -4997,8 +5105,8 @@
         </p:nvSpPr>
         <p:spPr>
           <a:xfrm>
-            <a:off x="594360" y="2980944"/>
-            <a:ext cx="11002975" cy="347472"/>
+            <a:off x="640080" y="2985516"/>
+            <a:ext cx="10911535" cy="731520"/>
           </a:xfrm>
           <a:prstGeom prst="rect">
             <a:avLst/>
@@ -5013,83 +5121,13 @@
           <a:p>
             <a:pPr algn="ctr"/>
             <a:r>
-              <a:rPr sz="2200" b="0" i="1">
-                <a:solidFill>
-                  <a:srgbClr val="8C8C8C"/>
-                </a:solidFill>
-                <a:latin typeface="Arial"/>
-              </a:rPr>
-              <a:t/>
-            </a:r>
-          </a:p>
-        </p:txBody>
-      </p:sp>
-      <p:sp>
-        <p:nvSpPr>
-          <p:cNvPr id="4" name="TextBox 3"/>
-          <p:cNvSpPr txBox="1"/>
-          <p:nvPr/>
-        </p:nvSpPr>
-        <p:spPr>
-          <a:xfrm>
-            <a:off x="594360" y="3529584"/>
-            <a:ext cx="11002975" cy="685800"/>
-          </a:xfrm>
-          <a:prstGeom prst="rect">
-            <a:avLst/>
-          </a:prstGeom>
-          <a:noFill/>
-        </p:spPr>
-        <p:txBody>
-          <a:bodyPr wrap="square">
-            <a:spAutoFit/>
-          </a:bodyPr>
-          <a:lstStyle/>
-          <a:p>
-            <a:pPr algn="ctr"/>
-            <a:r>
-              <a:rPr sz="4400" b="1" i="0">
+              <a:rPr sz="4800" b="1" i="0">
                 <a:solidFill>
                   <a:srgbClr val="FFFFFF"/>
                 </a:solidFill>
                 <a:latin typeface="Arial"/>
               </a:rPr>
               <a:t>Traído pelos seus</a:t>
-            </a:r>
-          </a:p>
-        </p:txBody>
-      </p:sp>
-      <p:sp>
-        <p:nvSpPr>
-          <p:cNvPr id="5" name="TextBox 4"/>
-          <p:cNvSpPr txBox="1"/>
-          <p:nvPr/>
-        </p:nvSpPr>
-        <p:spPr>
-          <a:xfrm>
-            <a:off x="594360" y="4251960"/>
-            <a:ext cx="11002975" cy="347472"/>
-          </a:xfrm>
-          <a:prstGeom prst="rect">
-            <a:avLst/>
-          </a:prstGeom>
-          <a:noFill/>
-        </p:spPr>
-        <p:txBody>
-          <a:bodyPr wrap="square">
-            <a:spAutoFit/>
-          </a:bodyPr>
-          <a:lstStyle/>
-          <a:p>
-            <a:pPr algn="ctr"/>
-            <a:r>
-              <a:rPr sz="2200" b="0" i="1">
-                <a:solidFill>
-                  <a:srgbClr val="8C8C8C"/>
-                </a:solidFill>
-                <a:latin typeface="Arial"/>
-              </a:rPr>
-              <a:t/>
             </a:r>
           </a:p>
         </p:txBody>
@@ -5128,8 +5166,8 @@
         </p:nvSpPr>
         <p:spPr>
           <a:xfrm>
-            <a:off x="594360" y="2258568"/>
-            <a:ext cx="11002975" cy="685800"/>
+            <a:off x="640080" y="2052828"/>
+            <a:ext cx="10911535" cy="731520"/>
           </a:xfrm>
           <a:prstGeom prst="rect">
             <a:avLst/>
@@ -5144,7 +5182,7 @@
           <a:p>
             <a:pPr algn="ctr"/>
             <a:r>
-              <a:rPr sz="4400" b="1" i="0">
+              <a:rPr sz="4800" b="1" i="0">
                 <a:solidFill>
                   <a:srgbClr val="FFFFFF"/>
                 </a:solidFill>
@@ -5163,8 +5201,8 @@
         </p:nvSpPr>
         <p:spPr>
           <a:xfrm>
-            <a:off x="594360" y="2980944"/>
-            <a:ext cx="11002975" cy="347472"/>
+            <a:off x="640080" y="2985516"/>
+            <a:ext cx="10911535" cy="731520"/>
           </a:xfrm>
           <a:prstGeom prst="rect">
             <a:avLst/>
@@ -5179,83 +5217,13 @@
           <a:p>
             <a:pPr algn="ctr"/>
             <a:r>
-              <a:rPr sz="2200" b="0" i="1">
-                <a:solidFill>
-                  <a:srgbClr val="8C8C8C"/>
-                </a:solidFill>
-                <a:latin typeface="Arial"/>
-              </a:rPr>
-              <a:t/>
-            </a:r>
-          </a:p>
-        </p:txBody>
-      </p:sp>
-      <p:sp>
-        <p:nvSpPr>
-          <p:cNvPr id="4" name="TextBox 3"/>
-          <p:cNvSpPr txBox="1"/>
-          <p:nvPr/>
-        </p:nvSpPr>
-        <p:spPr>
-          <a:xfrm>
-            <a:off x="594360" y="3529584"/>
-            <a:ext cx="11002975" cy="685800"/>
-          </a:xfrm>
-          <a:prstGeom prst="rect">
-            <a:avLst/>
-          </a:prstGeom>
-          <a:noFill/>
-        </p:spPr>
-        <p:txBody>
-          <a:bodyPr wrap="square">
-            <a:spAutoFit/>
-          </a:bodyPr>
-          <a:lstStyle/>
-          <a:p>
-            <a:pPr algn="ctr"/>
-            <a:r>
-              <a:rPr sz="4400" b="1" i="0">
+              <a:rPr sz="4800" b="1" i="0">
                 <a:solidFill>
                   <a:srgbClr val="FFFFFF"/>
                 </a:solidFill>
                 <a:latin typeface="Arial"/>
               </a:rPr>
               <a:t>Todo o pecado meu</a:t>
-            </a:r>
-          </a:p>
-        </p:txBody>
-      </p:sp>
-      <p:sp>
-        <p:nvSpPr>
-          <p:cNvPr id="5" name="TextBox 4"/>
-          <p:cNvSpPr txBox="1"/>
-          <p:nvPr/>
-        </p:nvSpPr>
-        <p:spPr>
-          <a:xfrm>
-            <a:off x="594360" y="4251960"/>
-            <a:ext cx="11002975" cy="347472"/>
-          </a:xfrm>
-          <a:prstGeom prst="rect">
-            <a:avLst/>
-          </a:prstGeom>
-          <a:noFill/>
-        </p:spPr>
-        <p:txBody>
-          <a:bodyPr wrap="square">
-            <a:spAutoFit/>
-          </a:bodyPr>
-          <a:lstStyle/>
-          <a:p>
-            <a:pPr algn="ctr"/>
-            <a:r>
-              <a:rPr sz="2200" b="0" i="1">
-                <a:solidFill>
-                  <a:srgbClr val="8C8C8C"/>
-                </a:solidFill>
-                <a:latin typeface="Arial"/>
-              </a:rPr>
-              <a:t/>
             </a:r>
           </a:p>
         </p:txBody>
@@ -5294,8 +5262,8 @@
         </p:nvSpPr>
         <p:spPr>
           <a:xfrm>
-            <a:off x="594360" y="2258568"/>
-            <a:ext cx="11002975" cy="685800"/>
+            <a:off x="640080" y="2052828"/>
+            <a:ext cx="10911535" cy="731520"/>
           </a:xfrm>
           <a:prstGeom prst="rect">
             <a:avLst/>
@@ -5310,7 +5278,7 @@
           <a:p>
             <a:pPr algn="ctr"/>
             <a:r>
-              <a:rPr sz="4400" b="1" i="0">
+              <a:rPr sz="4800" b="1" i="0">
                 <a:solidFill>
                   <a:srgbClr val="FFFFFF"/>
                 </a:solidFill>
@@ -5329,8 +5297,8 @@
         </p:nvSpPr>
         <p:spPr>
           <a:xfrm>
-            <a:off x="594360" y="2980944"/>
-            <a:ext cx="11002975" cy="347472"/>
+            <a:off x="640080" y="2985516"/>
+            <a:ext cx="10911535" cy="731520"/>
           </a:xfrm>
           <a:prstGeom prst="rect">
             <a:avLst/>
@@ -5345,83 +5313,13 @@
           <a:p>
             <a:pPr algn="ctr"/>
             <a:r>
-              <a:rPr sz="2200" b="0" i="1">
-                <a:solidFill>
-                  <a:srgbClr val="8C8C8C"/>
-                </a:solidFill>
-                <a:latin typeface="Arial"/>
-              </a:rPr>
-              <a:t/>
-            </a:r>
-          </a:p>
-        </p:txBody>
-      </p:sp>
-      <p:sp>
-        <p:nvSpPr>
-          <p:cNvPr id="4" name="TextBox 3"/>
-          <p:cNvSpPr txBox="1"/>
-          <p:nvPr/>
-        </p:nvSpPr>
-        <p:spPr>
-          <a:xfrm>
-            <a:off x="594360" y="3529584"/>
-            <a:ext cx="11002975" cy="685800"/>
-          </a:xfrm>
-          <a:prstGeom prst="rect">
-            <a:avLst/>
-          </a:prstGeom>
-          <a:noFill/>
-        </p:spPr>
-        <p:txBody>
-          <a:bodyPr wrap="square">
-            <a:spAutoFit/>
-          </a:bodyPr>
-          <a:lstStyle/>
-          <a:p>
-            <a:pPr algn="ctr"/>
-            <a:r>
-              <a:rPr sz="4400" b="1" i="0">
+              <a:rPr sz="4800" b="1" i="0">
                 <a:solidFill>
                   <a:srgbClr val="FFFFFF"/>
                 </a:solidFill>
                 <a:latin typeface="Arial"/>
               </a:rPr>
               <a:t>Açoite, escárnio e dor</a:t>
-            </a:r>
-          </a:p>
-        </p:txBody>
-      </p:sp>
-      <p:sp>
-        <p:nvSpPr>
-          <p:cNvPr id="5" name="TextBox 4"/>
-          <p:cNvSpPr txBox="1"/>
-          <p:nvPr/>
-        </p:nvSpPr>
-        <p:spPr>
-          <a:xfrm>
-            <a:off x="594360" y="4251960"/>
-            <a:ext cx="11002975" cy="347472"/>
-          </a:xfrm>
-          <a:prstGeom prst="rect">
-            <a:avLst/>
-          </a:prstGeom>
-          <a:noFill/>
-        </p:spPr>
-        <p:txBody>
-          <a:bodyPr wrap="square">
-            <a:spAutoFit/>
-          </a:bodyPr>
-          <a:lstStyle/>
-          <a:p>
-            <a:pPr algn="ctr"/>
-            <a:r>
-              <a:rPr sz="2200" b="0" i="1">
-                <a:solidFill>
-                  <a:srgbClr val="8C8C8C"/>
-                </a:solidFill>
-                <a:latin typeface="Arial"/>
-              </a:rPr>
-              <a:t/>
             </a:r>
           </a:p>
         </p:txBody>
@@ -5460,8 +5358,8 @@
         </p:nvSpPr>
         <p:spPr>
           <a:xfrm>
-            <a:off x="594360" y="2258568"/>
-            <a:ext cx="11002975" cy="685800"/>
+            <a:off x="640080" y="2052828"/>
+            <a:ext cx="10911535" cy="731520"/>
           </a:xfrm>
           <a:prstGeom prst="rect">
             <a:avLst/>
@@ -5476,7 +5374,7 @@
           <a:p>
             <a:pPr algn="ctr"/>
             <a:r>
-              <a:rPr sz="4400" b="1" i="0">
+              <a:rPr sz="4800" b="1" i="0">
                 <a:solidFill>
                   <a:srgbClr val="FFFFFF"/>
                 </a:solidFill>
@@ -5495,8 +5393,8 @@
         </p:nvSpPr>
         <p:spPr>
           <a:xfrm>
-            <a:off x="594360" y="2980944"/>
-            <a:ext cx="11002975" cy="347472"/>
+            <a:off x="640080" y="2985516"/>
+            <a:ext cx="10911535" cy="731520"/>
           </a:xfrm>
           <a:prstGeom prst="rect">
             <a:avLst/>
@@ -5511,83 +5409,13 @@
           <a:p>
             <a:pPr algn="ctr"/>
             <a:r>
-              <a:rPr sz="2200" b="0" i="1">
-                <a:solidFill>
-                  <a:srgbClr val="8C8C8C"/>
-                </a:solidFill>
-                <a:latin typeface="Arial"/>
-              </a:rPr>
-              <a:t/>
-            </a:r>
-          </a:p>
-        </p:txBody>
-      </p:sp>
-      <p:sp>
-        <p:nvSpPr>
-          <p:cNvPr id="4" name="TextBox 3"/>
-          <p:cNvSpPr txBox="1"/>
-          <p:nvPr/>
-        </p:nvSpPr>
-        <p:spPr>
-          <a:xfrm>
-            <a:off x="594360" y="3529584"/>
-            <a:ext cx="11002975" cy="685800"/>
-          </a:xfrm>
-          <a:prstGeom prst="rect">
-            <a:avLst/>
-          </a:prstGeom>
-          <a:noFill/>
-        </p:spPr>
-        <p:txBody>
-          <a:bodyPr wrap="square">
-            <a:spAutoFit/>
-          </a:bodyPr>
-          <a:lstStyle/>
-          <a:p>
-            <a:pPr algn="ctr"/>
-            <a:r>
-              <a:rPr sz="4400" b="1" i="0">
+              <a:rPr sz="4800" b="1" i="0">
                 <a:solidFill>
                   <a:srgbClr val="FFFFFF"/>
                 </a:solidFill>
                 <a:latin typeface="Arial"/>
               </a:rPr>
               <a:t>Na cruz se entregou</a:t>
-            </a:r>
-          </a:p>
-        </p:txBody>
-      </p:sp>
-      <p:sp>
-        <p:nvSpPr>
-          <p:cNvPr id="5" name="TextBox 4"/>
-          <p:cNvSpPr txBox="1"/>
-          <p:nvPr/>
-        </p:nvSpPr>
-        <p:spPr>
-          <a:xfrm>
-            <a:off x="594360" y="4251960"/>
-            <a:ext cx="11002975" cy="347472"/>
-          </a:xfrm>
-          <a:prstGeom prst="rect">
-            <a:avLst/>
-          </a:prstGeom>
-          <a:noFill/>
-        </p:spPr>
-        <p:txBody>
-          <a:bodyPr wrap="square">
-            <a:spAutoFit/>
-          </a:bodyPr>
-          <a:lstStyle/>
-          <a:p>
-            <a:pPr algn="ctr"/>
-            <a:r>
-              <a:rPr sz="2200" b="0" i="1">
-                <a:solidFill>
-                  <a:srgbClr val="8C8C8C"/>
-                </a:solidFill>
-                <a:latin typeface="Arial"/>
-              </a:rPr>
-              <a:t/>
             </a:r>
           </a:p>
         </p:txBody>
@@ -5626,8 +5454,8 @@
         </p:nvSpPr>
         <p:spPr>
           <a:xfrm>
-            <a:off x="594360" y="2258568"/>
-            <a:ext cx="11002975" cy="685800"/>
+            <a:off x="640080" y="2052828"/>
+            <a:ext cx="10911535" cy="731520"/>
           </a:xfrm>
           <a:prstGeom prst="rect">
             <a:avLst/>
@@ -5642,7 +5470,7 @@
           <a:p>
             <a:pPr algn="ctr"/>
             <a:r>
-              <a:rPr sz="4400" b="1" i="0">
+              <a:rPr sz="4800" b="1" i="0">
                 <a:solidFill>
                   <a:srgbClr val="FFFFFF"/>
                 </a:solidFill>
@@ -5661,8 +5489,8 @@
         </p:nvSpPr>
         <p:spPr>
           <a:xfrm>
-            <a:off x="594360" y="2980944"/>
-            <a:ext cx="11002975" cy="347472"/>
+            <a:off x="640080" y="2985516"/>
+            <a:ext cx="10911535" cy="731520"/>
           </a:xfrm>
           <a:prstGeom prst="rect">
             <a:avLst/>
@@ -5677,83 +5505,13 @@
           <a:p>
             <a:pPr algn="ctr"/>
             <a:r>
-              <a:rPr sz="2200" b="0" i="1">
-                <a:solidFill>
-                  <a:srgbClr val="8C8C8C"/>
-                </a:solidFill>
-                <a:latin typeface="Arial"/>
-              </a:rPr>
-              <a:t/>
-            </a:r>
-          </a:p>
-        </p:txBody>
-      </p:sp>
-      <p:sp>
-        <p:nvSpPr>
-          <p:cNvPr id="4" name="TextBox 3"/>
-          <p:cNvSpPr txBox="1"/>
-          <p:nvPr/>
-        </p:nvSpPr>
-        <p:spPr>
-          <a:xfrm>
-            <a:off x="594360" y="3529584"/>
-            <a:ext cx="11002975" cy="685800"/>
-          </a:xfrm>
-          <a:prstGeom prst="rect">
-            <a:avLst/>
-          </a:prstGeom>
-          <a:noFill/>
-        </p:spPr>
-        <p:txBody>
-          <a:bodyPr wrap="square">
-            <a:spAutoFit/>
-          </a:bodyPr>
-          <a:lstStyle/>
-          <a:p>
-            <a:pPr algn="ctr"/>
-            <a:r>
-              <a:rPr sz="4400" b="1" i="0">
+              <a:rPr sz="4800" b="1" i="0">
                 <a:solidFill>
                   <a:srgbClr val="FFFFFF"/>
                 </a:solidFill>
                 <a:latin typeface="Arial"/>
               </a:rPr>
               <a:t>Derramaste ali teu amor</a:t>
-            </a:r>
-          </a:p>
-        </p:txBody>
-      </p:sp>
-      <p:sp>
-        <p:nvSpPr>
-          <p:cNvPr id="5" name="TextBox 4"/>
-          <p:cNvSpPr txBox="1"/>
-          <p:nvPr/>
-        </p:nvSpPr>
-        <p:spPr>
-          <a:xfrm>
-            <a:off x="594360" y="4251960"/>
-            <a:ext cx="11002975" cy="347472"/>
-          </a:xfrm>
-          <a:prstGeom prst="rect">
-            <a:avLst/>
-          </a:prstGeom>
-          <a:noFill/>
-        </p:spPr>
-        <p:txBody>
-          <a:bodyPr wrap="square">
-            <a:spAutoFit/>
-          </a:bodyPr>
-          <a:lstStyle/>
-          <a:p>
-            <a:pPr algn="ctr"/>
-            <a:r>
-              <a:rPr sz="2200" b="0" i="1">
-                <a:solidFill>
-                  <a:srgbClr val="8C8C8C"/>
-                </a:solidFill>
-                <a:latin typeface="Arial"/>
-              </a:rPr>
-              <a:t/>
             </a:r>
           </a:p>
         </p:txBody>
@@ -5792,8 +5550,8 @@
         </p:nvSpPr>
         <p:spPr>
           <a:xfrm>
-            <a:off x="594360" y="2258568"/>
-            <a:ext cx="11002975" cy="685800"/>
+            <a:off x="640080" y="2052828"/>
+            <a:ext cx="10911535" cy="731520"/>
           </a:xfrm>
           <a:prstGeom prst="rect">
             <a:avLst/>
@@ -5808,7 +5566,7 @@
           <a:p>
             <a:pPr algn="ctr"/>
             <a:r>
-              <a:rPr sz="4400" b="1" i="0">
+              <a:rPr sz="4800" b="1" i="0">
                 <a:solidFill>
                   <a:srgbClr val="FFFFFF"/>
                 </a:solidFill>
@@ -5827,8 +5585,8 @@
         </p:nvSpPr>
         <p:spPr>
           <a:xfrm>
-            <a:off x="594360" y="2980944"/>
-            <a:ext cx="11002975" cy="347472"/>
+            <a:off x="640080" y="2985516"/>
+            <a:ext cx="10911535" cy="731520"/>
           </a:xfrm>
           <a:prstGeom prst="rect">
             <a:avLst/>
@@ -5843,83 +5601,13 @@
           <a:p>
             <a:pPr algn="ctr"/>
             <a:r>
-              <a:rPr sz="2200" b="0" i="1">
-                <a:solidFill>
-                  <a:srgbClr val="8C8C8C"/>
-                </a:solidFill>
-                <a:latin typeface="Arial"/>
-              </a:rPr>
-              <a:t/>
-            </a:r>
-          </a:p>
-        </p:txBody>
-      </p:sp>
-      <p:sp>
-        <p:nvSpPr>
-          <p:cNvPr id="4" name="TextBox 3"/>
-          <p:cNvSpPr txBox="1"/>
-          <p:nvPr/>
-        </p:nvSpPr>
-        <p:spPr>
-          <a:xfrm>
-            <a:off x="594360" y="3529584"/>
-            <a:ext cx="11002975" cy="685800"/>
-          </a:xfrm>
-          <a:prstGeom prst="rect">
-            <a:avLst/>
-          </a:prstGeom>
-          <a:noFill/>
-        </p:spPr>
-        <p:txBody>
-          <a:bodyPr wrap="square">
-            <a:spAutoFit/>
-          </a:bodyPr>
-          <a:lstStyle/>
-          <a:p>
-            <a:pPr algn="ctr"/>
-            <a:r>
-              <a:rPr sz="4400" b="1" i="0">
+              <a:rPr sz="4800" b="1" i="0">
                 <a:solidFill>
                   <a:srgbClr val="FFFFFF"/>
                 </a:solidFill>
                 <a:latin typeface="Arial"/>
               </a:rPr>
               <a:t>Glória e honra a ti, Senhor</a:t>
-            </a:r>
-          </a:p>
-        </p:txBody>
-      </p:sp>
-      <p:sp>
-        <p:nvSpPr>
-          <p:cNvPr id="5" name="TextBox 4"/>
-          <p:cNvSpPr txBox="1"/>
-          <p:nvPr/>
-        </p:nvSpPr>
-        <p:spPr>
-          <a:xfrm>
-            <a:off x="594360" y="4251960"/>
-            <a:ext cx="11002975" cy="347472"/>
-          </a:xfrm>
-          <a:prstGeom prst="rect">
-            <a:avLst/>
-          </a:prstGeom>
-          <a:noFill/>
-        </p:spPr>
-        <p:txBody>
-          <a:bodyPr wrap="square">
-            <a:spAutoFit/>
-          </a:bodyPr>
-          <a:lstStyle/>
-          <a:p>
-            <a:pPr algn="ctr"/>
-            <a:r>
-              <a:rPr sz="2200" b="0" i="1">
-                <a:solidFill>
-                  <a:srgbClr val="8C8C8C"/>
-                </a:solidFill>
-                <a:latin typeface="Arial"/>
-              </a:rPr>
-              <a:t/>
             </a:r>
           </a:p>
         </p:txBody>

--- a/output_pptx/Man_Of_Sorrows.pptx
+++ b/output_pptx/Man_Of_Sorrows.pptx
@@ -3420,6 +3420,76 @@
           </a:p>
         </p:txBody>
       </p:sp>
+      <p:sp>
+        <p:nvSpPr>
+          <p:cNvPr id="4" name="TextBox 3"/>
+          <p:cNvSpPr txBox="1"/>
+          <p:nvPr/>
+        </p:nvSpPr>
+        <p:spPr>
+          <a:xfrm>
+            <a:off x="640080" y="4128516"/>
+            <a:ext cx="10911535" cy="310896"/>
+          </a:xfrm>
+          <a:prstGeom prst="rect">
+            <a:avLst/>
+          </a:prstGeom>
+          <a:noFill/>
+        </p:spPr>
+        <p:txBody>
+          <a:bodyPr wrap="square">
+            <a:spAutoFit/>
+          </a:bodyPr>
+          <a:lstStyle/>
+          <a:p>
+            <a:pPr algn="ctr"/>
+            <a:r>
+              <a:rPr sz="2000" b="0" i="0">
+                <a:solidFill>
+                  <a:srgbClr val="828282"/>
+                </a:solidFill>
+                <a:latin typeface="Arial"/>
+              </a:rPr>
+              <a:t>粗い十字架で私を救われた</a:t>
+            </a:r>
+          </a:p>
+        </p:txBody>
+      </p:sp>
+      <p:sp>
+        <p:nvSpPr>
+          <p:cNvPr id="5" name="TextBox 4"/>
+          <p:cNvSpPr txBox="1"/>
+          <p:nvPr/>
+        </p:nvSpPr>
+        <p:spPr>
+          <a:xfrm>
+            <a:off x="640080" y="4494276"/>
+            <a:ext cx="10911535" cy="310896"/>
+          </a:xfrm>
+          <a:prstGeom prst="rect">
+            <a:avLst/>
+          </a:prstGeom>
+          <a:noFill/>
+        </p:spPr>
+        <p:txBody>
+          <a:bodyPr wrap="square">
+            <a:spAutoFit/>
+          </a:bodyPr>
+          <a:lstStyle/>
+          <a:p>
+            <a:pPr algn="ctr"/>
+            <a:r>
+              <a:rPr sz="2000" b="0" i="0">
+                <a:solidFill>
+                  <a:srgbClr val="828282"/>
+                </a:solidFill>
+                <a:latin typeface="Arial"/>
+              </a:rPr>
+              <a:t>あなたの愛をそこに注ぎ出された</a:t>
+            </a:r>
+          </a:p>
+        </p:txBody>
+      </p:sp>
     </p:spTree>
   </p:cSld>
   <p:clrMapOvr>
@@ -3516,6 +3586,76 @@
           </a:p>
         </p:txBody>
       </p:sp>
+      <p:sp>
+        <p:nvSpPr>
+          <p:cNvPr id="4" name="TextBox 3"/>
+          <p:cNvSpPr txBox="1"/>
+          <p:nvPr/>
+        </p:nvSpPr>
+        <p:spPr>
+          <a:xfrm>
+            <a:off x="640080" y="4128516"/>
+            <a:ext cx="10911535" cy="310896"/>
+          </a:xfrm>
+          <a:prstGeom prst="rect">
+            <a:avLst/>
+          </a:prstGeom>
+          <a:noFill/>
+        </p:spPr>
+        <p:txBody>
+          <a:bodyPr wrap="square">
+            <a:spAutoFit/>
+          </a:bodyPr>
+          <a:lstStyle/>
+          <a:p>
+            <a:pPr algn="ctr"/>
+            <a:r>
+              <a:rPr sz="2000" b="0" i="0">
+                <a:solidFill>
+                  <a:srgbClr val="828282"/>
+                </a:solidFill>
+                <a:latin typeface="Arial"/>
+              </a:rPr>
+              <a:t>私の魂はハレルヤと歌う</a:t>
+            </a:r>
+          </a:p>
+        </p:txBody>
+      </p:sp>
+      <p:sp>
+        <p:nvSpPr>
+          <p:cNvPr id="5" name="TextBox 4"/>
+          <p:cNvSpPr txBox="1"/>
+          <p:nvPr/>
+        </p:nvSpPr>
+        <p:spPr>
+          <a:xfrm>
+            <a:off x="640080" y="4494276"/>
+            <a:ext cx="10911535" cy="310896"/>
+          </a:xfrm>
+          <a:prstGeom prst="rect">
+            <a:avLst/>
+          </a:prstGeom>
+          <a:noFill/>
+        </p:spPr>
+        <p:txBody>
+          <a:bodyPr wrap="square">
+            <a:spAutoFit/>
+          </a:bodyPr>
+          <a:lstStyle/>
+          <a:p>
+            <a:pPr algn="ctr"/>
+            <a:r>
+              <a:rPr sz="2000" b="0" i="0">
+                <a:solidFill>
+                  <a:srgbClr val="828282"/>
+                </a:solidFill>
+                <a:latin typeface="Arial"/>
+              </a:rPr>
+              <a:t>栄光と誉れを主にささげます</a:t>
+            </a:r>
+          </a:p>
+        </p:txBody>
+      </p:sp>
     </p:spTree>
   </p:cSld>
   <p:clrMapOvr>
@@ -4084,6 +4224,76 @@
           </a:p>
         </p:txBody>
       </p:sp>
+      <p:sp>
+        <p:nvSpPr>
+          <p:cNvPr id="4" name="TextBox 3"/>
+          <p:cNvSpPr txBox="1"/>
+          <p:nvPr/>
+        </p:nvSpPr>
+        <p:spPr>
+          <a:xfrm>
+            <a:off x="640080" y="4128516"/>
+            <a:ext cx="10911535" cy="310896"/>
+          </a:xfrm>
+          <a:prstGeom prst="rect">
+            <a:avLst/>
+          </a:prstGeom>
+          <a:noFill/>
+        </p:spPr>
+        <p:txBody>
+          <a:bodyPr wrap="square">
+            <a:spAutoFit/>
+          </a:bodyPr>
+          <a:lstStyle/>
+          <a:p>
+            <a:pPr algn="ctr"/>
+            <a:r>
+              <a:rPr sz="2000" b="0" i="0">
+                <a:solidFill>
+                  <a:srgbClr val="828282"/>
+                </a:solidFill>
+                <a:latin typeface="Arial"/>
+              </a:rPr>
+              <a:t>神の独り子よ</a:t>
+            </a:r>
+          </a:p>
+        </p:txBody>
+      </p:sp>
+      <p:sp>
+        <p:nvSpPr>
+          <p:cNvPr id="5" name="TextBox 4"/>
+          <p:cNvSpPr txBox="1"/>
+          <p:nvPr/>
+        </p:nvSpPr>
+        <p:spPr>
+          <a:xfrm>
+            <a:off x="640080" y="4494276"/>
+            <a:ext cx="10911535" cy="310896"/>
+          </a:xfrm>
+          <a:prstGeom prst="rect">
+            <a:avLst/>
+          </a:prstGeom>
+          <a:noFill/>
+        </p:spPr>
+        <p:txBody>
+          <a:bodyPr wrap="square">
+            <a:spAutoFit/>
+          </a:bodyPr>
+          <a:lstStyle/>
+          <a:p>
+            <a:pPr algn="ctr"/>
+            <a:r>
+              <a:rPr sz="2000" b="0" i="0">
+                <a:solidFill>
+                  <a:srgbClr val="828282"/>
+                </a:solidFill>
+                <a:latin typeface="Arial"/>
+              </a:rPr>
+              <a:t>贖いのために来られた</a:t>
+            </a:r>
+          </a:p>
+        </p:txBody>
+      </p:sp>
     </p:spTree>
   </p:cSld>
   <p:clrMapOvr>
@@ -4180,6 +4390,76 @@
           </a:p>
         </p:txBody>
       </p:sp>
+      <p:sp>
+        <p:nvSpPr>
+          <p:cNvPr id="4" name="TextBox 3"/>
+          <p:cNvSpPr txBox="1"/>
+          <p:nvPr/>
+        </p:nvSpPr>
+        <p:spPr>
+          <a:xfrm>
+            <a:off x="640080" y="4128516"/>
+            <a:ext cx="10911535" cy="310896"/>
+          </a:xfrm>
+          <a:prstGeom prst="rect">
+            <a:avLst/>
+          </a:prstGeom>
+          <a:noFill/>
+        </p:spPr>
+        <p:txBody>
+          <a:bodyPr wrap="square">
+            <a:spAutoFit/>
+          </a:bodyPr>
+          <a:lstStyle/>
+          <a:p>
+            <a:pPr algn="ctr"/>
+            <a:r>
+              <a:rPr sz="2000" b="0" i="0">
+                <a:solidFill>
+                  <a:srgbClr val="828282"/>
+                </a:solidFill>
+                <a:latin typeface="Arial"/>
+              </a:rPr>
+              <a:t>そして赦される</a:t>
+            </a:r>
+          </a:p>
+        </p:txBody>
+      </p:sp>
+      <p:sp>
+        <p:nvSpPr>
+          <p:cNvPr id="5" name="TextBox 4"/>
+          <p:cNvSpPr txBox="1"/>
+          <p:nvPr/>
+        </p:nvSpPr>
+        <p:spPr>
+          <a:xfrm>
+            <a:off x="640080" y="4494276"/>
+            <a:ext cx="10911535" cy="310896"/>
+          </a:xfrm>
+          <a:prstGeom prst="rect">
+            <a:avLst/>
+          </a:prstGeom>
+          <a:noFill/>
+        </p:spPr>
+        <p:txBody>
+          <a:bodyPr wrap="square">
+            <a:spAutoFit/>
+          </a:bodyPr>
+          <a:lstStyle/>
+          <a:p>
+            <a:pPr algn="ctr"/>
+            <a:r>
+              <a:rPr sz="2000" b="0" i="0">
+                <a:solidFill>
+                  <a:srgbClr val="828282"/>
+                </a:solidFill>
+                <a:latin typeface="Arial"/>
+              </a:rPr>
+              <a:t>あなたに身を委ねるすべての者を</a:t>
+            </a:r>
+          </a:p>
+        </p:txBody>
+      </p:sp>
     </p:spTree>
   </p:cSld>
   <p:clrMapOvr>
@@ -4276,6 +4556,76 @@
           </a:p>
         </p:txBody>
       </p:sp>
+      <p:sp>
+        <p:nvSpPr>
+          <p:cNvPr id="4" name="TextBox 3"/>
+          <p:cNvSpPr txBox="1"/>
+          <p:nvPr/>
+        </p:nvSpPr>
+        <p:spPr>
+          <a:xfrm>
+            <a:off x="640080" y="4128516"/>
+            <a:ext cx="10911535" cy="310896"/>
+          </a:xfrm>
+          <a:prstGeom prst="rect">
+            <a:avLst/>
+          </a:prstGeom>
+          <a:noFill/>
+        </p:spPr>
+        <p:txBody>
+          <a:bodyPr wrap="square">
+            <a:spAutoFit/>
+          </a:bodyPr>
+          <a:lstStyle/>
+          <a:p>
+            <a:pPr algn="ctr"/>
+            <a:r>
+              <a:rPr sz="2000" b="0" i="0">
+                <a:solidFill>
+                  <a:srgbClr val="828282"/>
+                </a:solidFill>
+                <a:latin typeface="Arial"/>
+              </a:rPr>
+              <a:t>静かに耐え忍ばれた</a:t>
+            </a:r>
+          </a:p>
+        </p:txBody>
+      </p:sp>
+      <p:sp>
+        <p:nvSpPr>
+          <p:cNvPr id="5" name="TextBox 4"/>
+          <p:cNvSpPr txBox="1"/>
+          <p:nvPr/>
+        </p:nvSpPr>
+        <p:spPr>
+          <a:xfrm>
+            <a:off x="640080" y="4494276"/>
+            <a:ext cx="10911535" cy="310896"/>
+          </a:xfrm>
+          <a:prstGeom prst="rect">
+            <a:avLst/>
+          </a:prstGeom>
+          <a:noFill/>
+        </p:spPr>
+        <p:txBody>
+          <a:bodyPr wrap="square">
+            <a:spAutoFit/>
+          </a:bodyPr>
+          <a:lstStyle/>
+          <a:p>
+            <a:pPr algn="ctr"/>
+            <a:r>
+              <a:rPr sz="2000" b="0" i="0">
+                <a:solidFill>
+                  <a:srgbClr val="828282"/>
+                </a:solidFill>
+                <a:latin typeface="Arial"/>
+              </a:rPr>
+              <a:t>むちうち、嘲笑、痛みを</a:t>
+            </a:r>
+          </a:p>
+        </p:txBody>
+      </p:sp>
     </p:spTree>
   </p:cSld>
   <p:clrMapOvr>
@@ -4372,6 +4722,76 @@
           </a:p>
         </p:txBody>
       </p:sp>
+      <p:sp>
+        <p:nvSpPr>
+          <p:cNvPr id="4" name="TextBox 3"/>
+          <p:cNvSpPr txBox="1"/>
+          <p:nvPr/>
+        </p:nvSpPr>
+        <p:spPr>
+          <a:xfrm>
+            <a:off x="640080" y="4128516"/>
+            <a:ext cx="10911535" cy="310896"/>
+          </a:xfrm>
+          <a:prstGeom prst="rect">
+            <a:avLst/>
+          </a:prstGeom>
+          <a:noFill/>
+        </p:spPr>
+        <p:txBody>
+          <a:bodyPr wrap="square">
+            <a:spAutoFit/>
+          </a:bodyPr>
+          <a:lstStyle/>
+          <a:p>
+            <a:pPr algn="ctr"/>
+            <a:r>
+              <a:rPr sz="2000" b="0" i="0">
+                <a:solidFill>
+                  <a:srgbClr val="828282"/>
+                </a:solidFill>
+                <a:latin typeface="Arial"/>
+              </a:rPr>
+              <a:t>そして父への従順の中</a:t>
+            </a:r>
+          </a:p>
+        </p:txBody>
+      </p:sp>
+      <p:sp>
+        <p:nvSpPr>
+          <p:cNvPr id="5" name="TextBox 4"/>
+          <p:cNvSpPr txBox="1"/>
+          <p:nvPr/>
+        </p:nvSpPr>
+        <p:spPr>
+          <a:xfrm>
+            <a:off x="640080" y="4494276"/>
+            <a:ext cx="10911535" cy="310896"/>
+          </a:xfrm>
+          <a:prstGeom prst="rect">
+            <a:avLst/>
+          </a:prstGeom>
+          <a:noFill/>
+        </p:spPr>
+        <p:txBody>
+          <a:bodyPr wrap="square">
+            <a:spAutoFit/>
+          </a:bodyPr>
+          <a:lstStyle/>
+          <a:p>
+            <a:pPr algn="ctr"/>
+            <a:r>
+              <a:rPr sz="2000" b="0" i="0">
+                <a:solidFill>
+                  <a:srgbClr val="828282"/>
+                </a:solidFill>
+                <a:latin typeface="Arial"/>
+              </a:rPr>
+              <a:t>十字架に身を献げられた</a:t>
+            </a:r>
+          </a:p>
+        </p:txBody>
+      </p:sp>
     </p:spTree>
   </p:cSld>
   <p:clrMapOvr>
@@ -4468,6 +4888,76 @@
           </a:p>
         </p:txBody>
       </p:sp>
+      <p:sp>
+        <p:nvSpPr>
+          <p:cNvPr id="4" name="TextBox 3"/>
+          <p:cNvSpPr txBox="1"/>
+          <p:nvPr/>
+        </p:nvSpPr>
+        <p:spPr>
+          <a:xfrm>
+            <a:off x="640080" y="4128516"/>
+            <a:ext cx="10911535" cy="310896"/>
+          </a:xfrm>
+          <a:prstGeom prst="rect">
+            <a:avLst/>
+          </a:prstGeom>
+          <a:noFill/>
+        </p:spPr>
+        <p:txBody>
+          <a:bodyPr wrap="square">
+            <a:spAutoFit/>
+          </a:bodyPr>
+          <a:lstStyle/>
+          <a:p>
+            <a:pPr algn="ctr"/>
+            <a:r>
+              <a:rPr sz="2000" b="0" i="0">
+                <a:solidFill>
+                  <a:srgbClr val="828282"/>
+                </a:solidFill>
+                <a:latin typeface="Arial"/>
+              </a:rPr>
+              <a:t>粗い十字架で私を救われた</a:t>
+            </a:r>
+          </a:p>
+        </p:txBody>
+      </p:sp>
+      <p:sp>
+        <p:nvSpPr>
+          <p:cNvPr id="5" name="TextBox 4"/>
+          <p:cNvSpPr txBox="1"/>
+          <p:nvPr/>
+        </p:nvSpPr>
+        <p:spPr>
+          <a:xfrm>
+            <a:off x="640080" y="4494276"/>
+            <a:ext cx="10911535" cy="310896"/>
+          </a:xfrm>
+          <a:prstGeom prst="rect">
+            <a:avLst/>
+          </a:prstGeom>
+          <a:noFill/>
+        </p:spPr>
+        <p:txBody>
+          <a:bodyPr wrap="square">
+            <a:spAutoFit/>
+          </a:bodyPr>
+          <a:lstStyle/>
+          <a:p>
+            <a:pPr algn="ctr"/>
+            <a:r>
+              <a:rPr sz="2000" b="0" i="0">
+                <a:solidFill>
+                  <a:srgbClr val="828282"/>
+                </a:solidFill>
+                <a:latin typeface="Arial"/>
+              </a:rPr>
+              <a:t>あなたの愛をそこに注ぎ出された</a:t>
+            </a:r>
+          </a:p>
+        </p:txBody>
+      </p:sp>
     </p:spTree>
   </p:cSld>
   <p:clrMapOvr>
@@ -4564,6 +5054,76 @@
           </a:p>
         </p:txBody>
       </p:sp>
+      <p:sp>
+        <p:nvSpPr>
+          <p:cNvPr id="4" name="TextBox 3"/>
+          <p:cNvSpPr txBox="1"/>
+          <p:nvPr/>
+        </p:nvSpPr>
+        <p:spPr>
+          <a:xfrm>
+            <a:off x="640080" y="4128516"/>
+            <a:ext cx="10911535" cy="310896"/>
+          </a:xfrm>
+          <a:prstGeom prst="rect">
+            <a:avLst/>
+          </a:prstGeom>
+          <a:noFill/>
+        </p:spPr>
+        <p:txBody>
+          <a:bodyPr wrap="square">
+            <a:spAutoFit/>
+          </a:bodyPr>
+          <a:lstStyle/>
+          <a:p>
+            <a:pPr algn="ctr"/>
+            <a:r>
+              <a:rPr sz="2000" b="0" i="0">
+                <a:solidFill>
+                  <a:srgbClr val="828282"/>
+                </a:solidFill>
+                <a:latin typeface="Arial"/>
+              </a:rPr>
+              <a:t>私の魂はハレルヤと歌う</a:t>
+            </a:r>
+          </a:p>
+        </p:txBody>
+      </p:sp>
+      <p:sp>
+        <p:nvSpPr>
+          <p:cNvPr id="5" name="TextBox 4"/>
+          <p:cNvSpPr txBox="1"/>
+          <p:nvPr/>
+        </p:nvSpPr>
+        <p:spPr>
+          <a:xfrm>
+            <a:off x="640080" y="4494276"/>
+            <a:ext cx="10911535" cy="310896"/>
+          </a:xfrm>
+          <a:prstGeom prst="rect">
+            <a:avLst/>
+          </a:prstGeom>
+          <a:noFill/>
+        </p:spPr>
+        <p:txBody>
+          <a:bodyPr wrap="square">
+            <a:spAutoFit/>
+          </a:bodyPr>
+          <a:lstStyle/>
+          <a:p>
+            <a:pPr algn="ctr"/>
+            <a:r>
+              <a:rPr sz="2000" b="0" i="0">
+                <a:solidFill>
+                  <a:srgbClr val="828282"/>
+                </a:solidFill>
+                <a:latin typeface="Arial"/>
+              </a:rPr>
+              <a:t>栄光と誉れを主にささげます</a:t>
+            </a:r>
+          </a:p>
+        </p:txBody>
+      </p:sp>
     </p:spTree>
   </p:cSld>
   <p:clrMapOvr>
@@ -5132,6 +5692,76 @@
           </a:p>
         </p:txBody>
       </p:sp>
+      <p:sp>
+        <p:nvSpPr>
+          <p:cNvPr id="4" name="TextBox 3"/>
+          <p:cNvSpPr txBox="1"/>
+          <p:nvPr/>
+        </p:nvSpPr>
+        <p:spPr>
+          <a:xfrm>
+            <a:off x="640080" y="4128516"/>
+            <a:ext cx="10911535" cy="310896"/>
+          </a:xfrm>
+          <a:prstGeom prst="rect">
+            <a:avLst/>
+          </a:prstGeom>
+          <a:noFill/>
+        </p:spPr>
+        <p:txBody>
+          <a:bodyPr wrap="square">
+            <a:spAutoFit/>
+          </a:bodyPr>
+          <a:lstStyle/>
+          <a:p>
+            <a:pPr algn="ctr"/>
+            <a:r>
+              <a:rPr sz="2000" b="0" i="0">
+                <a:solidFill>
+                  <a:srgbClr val="828282"/>
+                </a:solidFill>
+                <a:latin typeface="Arial"/>
+              </a:rPr>
+              <a:t>苦しみを受けられた子羊</a:t>
+            </a:r>
+          </a:p>
+        </p:txBody>
+      </p:sp>
+      <p:sp>
+        <p:nvSpPr>
+          <p:cNvPr id="5" name="TextBox 4"/>
+          <p:cNvSpPr txBox="1"/>
+          <p:nvPr/>
+        </p:nvSpPr>
+        <p:spPr>
+          <a:xfrm>
+            <a:off x="640080" y="4494276"/>
+            <a:ext cx="10911535" cy="310896"/>
+          </a:xfrm>
+          <a:prstGeom prst="rect">
+            <a:avLst/>
+          </a:prstGeom>
+          <a:noFill/>
+        </p:spPr>
+        <p:txBody>
+          <a:bodyPr wrap="square">
+            <a:spAutoFit/>
+          </a:bodyPr>
+          <a:lstStyle/>
+          <a:p>
+            <a:pPr algn="ctr"/>
+            <a:r>
+              <a:rPr sz="2000" b="0" i="0">
+                <a:solidFill>
+                  <a:srgbClr val="828282"/>
+                </a:solidFill>
+                <a:latin typeface="Arial"/>
+              </a:rPr>
+              <a:t>自分の者たちに裏切られ</a:t>
+            </a:r>
+          </a:p>
+        </p:txBody>
+      </p:sp>
     </p:spTree>
   </p:cSld>
   <p:clrMapOvr>
@@ -5228,6 +5858,76 @@
           </a:p>
         </p:txBody>
       </p:sp>
+      <p:sp>
+        <p:nvSpPr>
+          <p:cNvPr id="4" name="TextBox 3"/>
+          <p:cNvSpPr txBox="1"/>
+          <p:nvPr/>
+        </p:nvSpPr>
+        <p:spPr>
+          <a:xfrm>
+            <a:off x="640080" y="4128516"/>
+            <a:ext cx="10911535" cy="310896"/>
+          </a:xfrm>
+          <a:prstGeom prst="rect">
+            <a:avLst/>
+          </a:prstGeom>
+          <a:noFill/>
+        </p:spPr>
+        <p:txBody>
+          <a:bodyPr wrap="square">
+            <a:spAutoFit/>
+          </a:bodyPr>
+          <a:lstStyle/>
+          <a:p>
+            <a:pPr algn="ctr"/>
+            <a:r>
+              <a:rPr sz="2000" b="0" i="0">
+                <a:solidFill>
+                  <a:srgbClr val="828282"/>
+                </a:solidFill>
+                <a:latin typeface="Arial"/>
+              </a:rPr>
+              <a:t>私のために担われた</a:t>
+            </a:r>
+          </a:p>
+        </p:txBody>
+      </p:sp>
+      <p:sp>
+        <p:nvSpPr>
+          <p:cNvPr id="5" name="TextBox 4"/>
+          <p:cNvSpPr txBox="1"/>
+          <p:nvPr/>
+        </p:nvSpPr>
+        <p:spPr>
+          <a:xfrm>
+            <a:off x="640080" y="4494276"/>
+            <a:ext cx="10911535" cy="310896"/>
+          </a:xfrm>
+          <a:prstGeom prst="rect">
+            <a:avLst/>
+          </a:prstGeom>
+          <a:noFill/>
+        </p:spPr>
+        <p:txBody>
+          <a:bodyPr wrap="square">
+            <a:spAutoFit/>
+          </a:bodyPr>
+          <a:lstStyle/>
+          <a:p>
+            <a:pPr algn="ctr"/>
+            <a:r>
+              <a:rPr sz="2000" b="0" i="0">
+                <a:solidFill>
+                  <a:srgbClr val="828282"/>
+                </a:solidFill>
+                <a:latin typeface="Arial"/>
+              </a:rPr>
+              <a:t>私のすべての罪を</a:t>
+            </a:r>
+          </a:p>
+        </p:txBody>
+      </p:sp>
     </p:spTree>
   </p:cSld>
   <p:clrMapOvr>
@@ -5324,6 +6024,76 @@
           </a:p>
         </p:txBody>
       </p:sp>
+      <p:sp>
+        <p:nvSpPr>
+          <p:cNvPr id="4" name="TextBox 3"/>
+          <p:cNvSpPr txBox="1"/>
+          <p:nvPr/>
+        </p:nvSpPr>
+        <p:spPr>
+          <a:xfrm>
+            <a:off x="640080" y="4128516"/>
+            <a:ext cx="10911535" cy="310896"/>
+          </a:xfrm>
+          <a:prstGeom prst="rect">
+            <a:avLst/>
+          </a:prstGeom>
+          <a:noFill/>
+        </p:spPr>
+        <p:txBody>
+          <a:bodyPr wrap="square">
+            <a:spAutoFit/>
+          </a:bodyPr>
+          <a:lstStyle/>
+          <a:p>
+            <a:pPr algn="ctr"/>
+            <a:r>
+              <a:rPr sz="2000" b="0" i="0">
+                <a:solidFill>
+                  <a:srgbClr val="828282"/>
+                </a:solidFill>
+                <a:latin typeface="Arial"/>
+              </a:rPr>
+              <a:t>静かに耐え忍ばれた</a:t>
+            </a:r>
+          </a:p>
+        </p:txBody>
+      </p:sp>
+      <p:sp>
+        <p:nvSpPr>
+          <p:cNvPr id="5" name="TextBox 4"/>
+          <p:cNvSpPr txBox="1"/>
+          <p:nvPr/>
+        </p:nvSpPr>
+        <p:spPr>
+          <a:xfrm>
+            <a:off x="640080" y="4494276"/>
+            <a:ext cx="10911535" cy="310896"/>
+          </a:xfrm>
+          <a:prstGeom prst="rect">
+            <a:avLst/>
+          </a:prstGeom>
+          <a:noFill/>
+        </p:spPr>
+        <p:txBody>
+          <a:bodyPr wrap="square">
+            <a:spAutoFit/>
+          </a:bodyPr>
+          <a:lstStyle/>
+          <a:p>
+            <a:pPr algn="ctr"/>
+            <a:r>
+              <a:rPr sz="2000" b="0" i="0">
+                <a:solidFill>
+                  <a:srgbClr val="828282"/>
+                </a:solidFill>
+                <a:latin typeface="Arial"/>
+              </a:rPr>
+              <a:t>むちうち、嘲笑、痛みを</a:t>
+            </a:r>
+          </a:p>
+        </p:txBody>
+      </p:sp>
     </p:spTree>
   </p:cSld>
   <p:clrMapOvr>
@@ -5420,6 +6190,76 @@
           </a:p>
         </p:txBody>
       </p:sp>
+      <p:sp>
+        <p:nvSpPr>
+          <p:cNvPr id="4" name="TextBox 3"/>
+          <p:cNvSpPr txBox="1"/>
+          <p:nvPr/>
+        </p:nvSpPr>
+        <p:spPr>
+          <a:xfrm>
+            <a:off x="640080" y="4128516"/>
+            <a:ext cx="10911535" cy="310896"/>
+          </a:xfrm>
+          <a:prstGeom prst="rect">
+            <a:avLst/>
+          </a:prstGeom>
+          <a:noFill/>
+        </p:spPr>
+        <p:txBody>
+          <a:bodyPr wrap="square">
+            <a:spAutoFit/>
+          </a:bodyPr>
+          <a:lstStyle/>
+          <a:p>
+            <a:pPr algn="ctr"/>
+            <a:r>
+              <a:rPr sz="2000" b="0" i="0">
+                <a:solidFill>
+                  <a:srgbClr val="828282"/>
+                </a:solidFill>
+                <a:latin typeface="Arial"/>
+              </a:rPr>
+              <a:t>そして父への従順の中</a:t>
+            </a:r>
+          </a:p>
+        </p:txBody>
+      </p:sp>
+      <p:sp>
+        <p:nvSpPr>
+          <p:cNvPr id="5" name="TextBox 4"/>
+          <p:cNvSpPr txBox="1"/>
+          <p:nvPr/>
+        </p:nvSpPr>
+        <p:spPr>
+          <a:xfrm>
+            <a:off x="640080" y="4494276"/>
+            <a:ext cx="10911535" cy="310896"/>
+          </a:xfrm>
+          <a:prstGeom prst="rect">
+            <a:avLst/>
+          </a:prstGeom>
+          <a:noFill/>
+        </p:spPr>
+        <p:txBody>
+          <a:bodyPr wrap="square">
+            <a:spAutoFit/>
+          </a:bodyPr>
+          <a:lstStyle/>
+          <a:p>
+            <a:pPr algn="ctr"/>
+            <a:r>
+              <a:rPr sz="2000" b="0" i="0">
+                <a:solidFill>
+                  <a:srgbClr val="828282"/>
+                </a:solidFill>
+                <a:latin typeface="Arial"/>
+              </a:rPr>
+              <a:t>十字架に身を献げられた</a:t>
+            </a:r>
+          </a:p>
+        </p:txBody>
+      </p:sp>
     </p:spTree>
   </p:cSld>
   <p:clrMapOvr>
@@ -5516,6 +6356,76 @@
           </a:p>
         </p:txBody>
       </p:sp>
+      <p:sp>
+        <p:nvSpPr>
+          <p:cNvPr id="4" name="TextBox 3"/>
+          <p:cNvSpPr txBox="1"/>
+          <p:nvPr/>
+        </p:nvSpPr>
+        <p:spPr>
+          <a:xfrm>
+            <a:off x="640080" y="4128516"/>
+            <a:ext cx="10911535" cy="310896"/>
+          </a:xfrm>
+          <a:prstGeom prst="rect">
+            <a:avLst/>
+          </a:prstGeom>
+          <a:noFill/>
+        </p:spPr>
+        <p:txBody>
+          <a:bodyPr wrap="square">
+            <a:spAutoFit/>
+          </a:bodyPr>
+          <a:lstStyle/>
+          <a:p>
+            <a:pPr algn="ctr"/>
+            <a:r>
+              <a:rPr sz="2000" b="0" i="0">
+                <a:solidFill>
+                  <a:srgbClr val="828282"/>
+                </a:solidFill>
+                <a:latin typeface="Arial"/>
+              </a:rPr>
+              <a:t>粗い十字架で私を救われた</a:t>
+            </a:r>
+          </a:p>
+        </p:txBody>
+      </p:sp>
+      <p:sp>
+        <p:nvSpPr>
+          <p:cNvPr id="5" name="TextBox 4"/>
+          <p:cNvSpPr txBox="1"/>
+          <p:nvPr/>
+        </p:nvSpPr>
+        <p:spPr>
+          <a:xfrm>
+            <a:off x="640080" y="4494276"/>
+            <a:ext cx="10911535" cy="310896"/>
+          </a:xfrm>
+          <a:prstGeom prst="rect">
+            <a:avLst/>
+          </a:prstGeom>
+          <a:noFill/>
+        </p:spPr>
+        <p:txBody>
+          <a:bodyPr wrap="square">
+            <a:spAutoFit/>
+          </a:bodyPr>
+          <a:lstStyle/>
+          <a:p>
+            <a:pPr algn="ctr"/>
+            <a:r>
+              <a:rPr sz="2000" b="0" i="0">
+                <a:solidFill>
+                  <a:srgbClr val="828282"/>
+                </a:solidFill>
+                <a:latin typeface="Arial"/>
+              </a:rPr>
+              <a:t>あなたの愛をそこに注ぎ出された</a:t>
+            </a:r>
+          </a:p>
+        </p:txBody>
+      </p:sp>
     </p:spTree>
   </p:cSld>
   <p:clrMapOvr>
@@ -5608,6 +6518,76 @@
                 <a:latin typeface="Arial"/>
               </a:rPr>
               <a:t>Glória e honra a ti, Senhor</a:t>
+            </a:r>
+          </a:p>
+        </p:txBody>
+      </p:sp>
+      <p:sp>
+        <p:nvSpPr>
+          <p:cNvPr id="4" name="TextBox 3"/>
+          <p:cNvSpPr txBox="1"/>
+          <p:nvPr/>
+        </p:nvSpPr>
+        <p:spPr>
+          <a:xfrm>
+            <a:off x="640080" y="4128516"/>
+            <a:ext cx="10911535" cy="310896"/>
+          </a:xfrm>
+          <a:prstGeom prst="rect">
+            <a:avLst/>
+          </a:prstGeom>
+          <a:noFill/>
+        </p:spPr>
+        <p:txBody>
+          <a:bodyPr wrap="square">
+            <a:spAutoFit/>
+          </a:bodyPr>
+          <a:lstStyle/>
+          <a:p>
+            <a:pPr algn="ctr"/>
+            <a:r>
+              <a:rPr sz="2000" b="0" i="0">
+                <a:solidFill>
+                  <a:srgbClr val="828282"/>
+                </a:solidFill>
+                <a:latin typeface="Arial"/>
+              </a:rPr>
+              <a:t>私の魂はハレルヤと歌う</a:t>
+            </a:r>
+          </a:p>
+        </p:txBody>
+      </p:sp>
+      <p:sp>
+        <p:nvSpPr>
+          <p:cNvPr id="5" name="TextBox 4"/>
+          <p:cNvSpPr txBox="1"/>
+          <p:nvPr/>
+        </p:nvSpPr>
+        <p:spPr>
+          <a:xfrm>
+            <a:off x="640080" y="4494276"/>
+            <a:ext cx="10911535" cy="310896"/>
+          </a:xfrm>
+          <a:prstGeom prst="rect">
+            <a:avLst/>
+          </a:prstGeom>
+          <a:noFill/>
+        </p:spPr>
+        <p:txBody>
+          <a:bodyPr wrap="square">
+            <a:spAutoFit/>
+          </a:bodyPr>
+          <a:lstStyle/>
+          <a:p>
+            <a:pPr algn="ctr"/>
+            <a:r>
+              <a:rPr sz="2000" b="0" i="0">
+                <a:solidFill>
+                  <a:srgbClr val="828282"/>
+                </a:solidFill>
+                <a:latin typeface="Arial"/>
+              </a:rPr>
+              <a:t>栄光と誉れを主にささげます</a:t>
             </a:r>
           </a:p>
         </p:txBody>
